--- a/презентация.pptx
+++ b/презентация.pptx
@@ -5,15 +5,21 @@
     <p:sldMasterId id="2147483648" r:id="rId1"/>
   </p:sldMasterIdLst>
   <p:notesMasterIdLst>
-    <p:notesMasterId r:id="rId8"/>
+    <p:notesMasterId r:id="rId14"/>
   </p:notesMasterIdLst>
   <p:sldIdLst>
     <p:sldId id="256" r:id="rId2"/>
     <p:sldId id="257" r:id="rId3"/>
-    <p:sldId id="258" r:id="rId4"/>
-    <p:sldId id="259" r:id="rId5"/>
-    <p:sldId id="260" r:id="rId6"/>
-    <p:sldId id="261" r:id="rId7"/>
+    <p:sldId id="262" r:id="rId4"/>
+    <p:sldId id="258" r:id="rId5"/>
+    <p:sldId id="263" r:id="rId6"/>
+    <p:sldId id="268" r:id="rId7"/>
+    <p:sldId id="259" r:id="rId8"/>
+    <p:sldId id="267" r:id="rId9"/>
+    <p:sldId id="266" r:id="rId10"/>
+    <p:sldId id="269" r:id="rId11"/>
+    <p:sldId id="260" r:id="rId12"/>
+    <p:sldId id="270" r:id="rId13"/>
   </p:sldIdLst>
   <p:sldSz cx="9144000" cy="6858000" type="screen4x3"/>
   <p:notesSz cx="6858000" cy="9144000"/>
@@ -197,7 +203,7 @@
           <a:p>
             <a:fld id="{22628CE5-B226-499C-BD3C-E981A131DC45}" type="datetimeFigureOut">
               <a:rPr lang="ru-RU" smtClean="0"/>
-              <a:t>12.05.2026</a:t>
+              <a:t>18.05.2026</a:t>
             </a:fld>
             <a:endParaRPr lang="ru-RU"/>
           </a:p>
@@ -553,6 +559,182 @@
 </p:notes>
 </file>
 
+<file path=ppt/notesSlides/notesSlide10.xml><?xml version="1.0" encoding="utf-8"?>
+<p:notes xmlns:a="http://schemas.openxmlformats.org/drawingml/2006/main" xmlns:r="http://schemas.openxmlformats.org/officeDocument/2006/relationships" xmlns:p="http://schemas.openxmlformats.org/presentationml/2006/main">
+  <p:cSld>
+    <p:spTree>
+      <p:nvGrpSpPr>
+        <p:cNvPr id="1" name=""/>
+        <p:cNvGrpSpPr/>
+        <p:nvPr/>
+      </p:nvGrpSpPr>
+      <p:grpSpPr>
+        <a:xfrm>
+          <a:off x="0" y="0"/>
+          <a:ext cx="0" cy="0"/>
+          <a:chOff x="0" y="0"/>
+          <a:chExt cx="0" cy="0"/>
+        </a:xfrm>
+      </p:grpSpPr>
+      <p:sp>
+        <p:nvSpPr>
+          <p:cNvPr id="2" name="Образ слайда 1"/>
+          <p:cNvSpPr>
+            <a:spLocks noGrp="1" noRot="1" noChangeAspect="1"/>
+          </p:cNvSpPr>
+          <p:nvPr>
+            <p:ph type="sldImg"/>
+          </p:nvPr>
+        </p:nvSpPr>
+        <p:spPr/>
+      </p:sp>
+      <p:sp>
+        <p:nvSpPr>
+          <p:cNvPr id="3" name="Заметки 2"/>
+          <p:cNvSpPr>
+            <a:spLocks noGrp="1"/>
+          </p:cNvSpPr>
+          <p:nvPr>
+            <p:ph type="body" idx="1"/>
+          </p:nvPr>
+        </p:nvSpPr>
+        <p:spPr/>
+        <p:txBody>
+          <a:bodyPr/>
+          <a:lstStyle/>
+          <a:p>
+            <a:r>
+              <a:rPr lang="ru-RU" dirty="0" err="1" smtClean="0"/>
+              <a:t>криис</a:t>
+            </a:r>
+            <a:endParaRPr lang="ru-RU" dirty="0"/>
+          </a:p>
+        </p:txBody>
+      </p:sp>
+      <p:sp>
+        <p:nvSpPr>
+          <p:cNvPr id="4" name="Номер слайда 3"/>
+          <p:cNvSpPr>
+            <a:spLocks noGrp="1"/>
+          </p:cNvSpPr>
+          <p:nvPr>
+            <p:ph type="sldNum" sz="quarter" idx="10"/>
+          </p:nvPr>
+        </p:nvSpPr>
+        <p:spPr/>
+        <p:txBody>
+          <a:bodyPr/>
+          <a:lstStyle/>
+          <a:p>
+            <a:fld id="{51D3AA95-FC74-4EB0-8DAF-CC87085178D8}" type="slidenum">
+              <a:rPr lang="ru-RU" smtClean="0"/>
+              <a:t>11</a:t>
+            </a:fld>
+            <a:endParaRPr lang="ru-RU"/>
+          </a:p>
+        </p:txBody>
+      </p:sp>
+    </p:spTree>
+    <p:extLst>
+      <p:ext uri="{BB962C8B-B14F-4D97-AF65-F5344CB8AC3E}">
+        <p14:creationId xmlns:p14="http://schemas.microsoft.com/office/powerpoint/2010/main" val="39953359"/>
+      </p:ext>
+    </p:extLst>
+  </p:cSld>
+  <p:clrMapOvr>
+    <a:masterClrMapping/>
+  </p:clrMapOvr>
+</p:notes>
+</file>
+
+<file path=ppt/notesSlides/notesSlide11.xml><?xml version="1.0" encoding="utf-8"?>
+<p:notes xmlns:a="http://schemas.openxmlformats.org/drawingml/2006/main" xmlns:r="http://schemas.openxmlformats.org/officeDocument/2006/relationships" xmlns:p="http://schemas.openxmlformats.org/presentationml/2006/main">
+  <p:cSld>
+    <p:spTree>
+      <p:nvGrpSpPr>
+        <p:cNvPr id="1" name=""/>
+        <p:cNvGrpSpPr/>
+        <p:nvPr/>
+      </p:nvGrpSpPr>
+      <p:grpSpPr>
+        <a:xfrm>
+          <a:off x="0" y="0"/>
+          <a:ext cx="0" cy="0"/>
+          <a:chOff x="0" y="0"/>
+          <a:chExt cx="0" cy="0"/>
+        </a:xfrm>
+      </p:grpSpPr>
+      <p:sp>
+        <p:nvSpPr>
+          <p:cNvPr id="2" name="Образ слайда 1"/>
+          <p:cNvSpPr>
+            <a:spLocks noGrp="1" noRot="1" noChangeAspect="1"/>
+          </p:cNvSpPr>
+          <p:nvPr>
+            <p:ph type="sldImg"/>
+          </p:nvPr>
+        </p:nvSpPr>
+        <p:spPr/>
+      </p:sp>
+      <p:sp>
+        <p:nvSpPr>
+          <p:cNvPr id="3" name="Заметки 2"/>
+          <p:cNvSpPr>
+            <a:spLocks noGrp="1"/>
+          </p:cNvSpPr>
+          <p:nvPr>
+            <p:ph type="body" idx="1"/>
+          </p:nvPr>
+        </p:nvSpPr>
+        <p:spPr/>
+        <p:txBody>
+          <a:bodyPr/>
+          <a:lstStyle/>
+          <a:p>
+            <a:r>
+              <a:rPr lang="ru-RU" dirty="0" err="1" smtClean="0"/>
+              <a:t>криис</a:t>
+            </a:r>
+            <a:endParaRPr lang="ru-RU" dirty="0"/>
+          </a:p>
+        </p:txBody>
+      </p:sp>
+      <p:sp>
+        <p:nvSpPr>
+          <p:cNvPr id="4" name="Номер слайда 3"/>
+          <p:cNvSpPr>
+            <a:spLocks noGrp="1"/>
+          </p:cNvSpPr>
+          <p:nvPr>
+            <p:ph type="sldNum" sz="quarter" idx="10"/>
+          </p:nvPr>
+        </p:nvSpPr>
+        <p:spPr/>
+        <p:txBody>
+          <a:bodyPr/>
+          <a:lstStyle/>
+          <a:p>
+            <a:fld id="{51D3AA95-FC74-4EB0-8DAF-CC87085178D8}" type="slidenum">
+              <a:rPr lang="ru-RU" smtClean="0"/>
+              <a:t>12</a:t>
+            </a:fld>
+            <a:endParaRPr lang="ru-RU"/>
+          </a:p>
+        </p:txBody>
+      </p:sp>
+    </p:spTree>
+    <p:extLst>
+      <p:ext uri="{BB962C8B-B14F-4D97-AF65-F5344CB8AC3E}">
+        <p14:creationId xmlns:p14="http://schemas.microsoft.com/office/powerpoint/2010/main" val="39953359"/>
+      </p:ext>
+    </p:extLst>
+  </p:cSld>
+  <p:clrMapOvr>
+    <a:masterClrMapping/>
+  </p:clrMapOvr>
+</p:notes>
+</file>
+
 <file path=ppt/notesSlides/notesSlide2.xml><?xml version="1.0" encoding="utf-8"?>
 <p:notes xmlns:a="http://schemas.openxmlformats.org/drawingml/2006/main" xmlns:r="http://schemas.openxmlformats.org/officeDocument/2006/relationships" xmlns:p="http://schemas.openxmlformats.org/presentationml/2006/main">
   <p:cSld>
@@ -599,7 +781,7 @@
           <a:p>
             <a:r>
               <a:rPr lang="ru-RU" dirty="0" err="1" smtClean="0"/>
-              <a:t>яреек</a:t>
+              <a:t>радеек</a:t>
             </a:r>
             <a:endParaRPr lang="ru-RU" dirty="0"/>
           </a:p>
@@ -631,7 +813,7 @@
     </p:spTree>
     <p:extLst>
       <p:ext uri="{BB962C8B-B14F-4D97-AF65-F5344CB8AC3E}">
-        <p14:creationId xmlns:p14="http://schemas.microsoft.com/office/powerpoint/2010/main" val="4035021549"/>
+        <p14:creationId xmlns:p14="http://schemas.microsoft.com/office/powerpoint/2010/main" val="3554253208"/>
       </p:ext>
     </p:extLst>
   </p:cSld>
@@ -719,7 +901,7 @@
     </p:spTree>
     <p:extLst>
       <p:ext uri="{BB962C8B-B14F-4D97-AF65-F5344CB8AC3E}">
-        <p14:creationId xmlns:p14="http://schemas.microsoft.com/office/powerpoint/2010/main" val="1015952067"/>
+        <p14:creationId xmlns:p14="http://schemas.microsoft.com/office/powerpoint/2010/main" val="4035021549"/>
       </p:ext>
     </p:extLst>
   </p:cSld>
@@ -775,7 +957,7 @@
           <a:p>
             <a:r>
               <a:rPr lang="ru-RU" dirty="0" err="1" smtClean="0"/>
-              <a:t>криис</a:t>
+              <a:t>яреек</a:t>
             </a:r>
             <a:endParaRPr lang="ru-RU" dirty="0"/>
           </a:p>
@@ -807,7 +989,7 @@
     </p:spTree>
     <p:extLst>
       <p:ext uri="{BB962C8B-B14F-4D97-AF65-F5344CB8AC3E}">
-        <p14:creationId xmlns:p14="http://schemas.microsoft.com/office/powerpoint/2010/main" val="39953359"/>
+        <p14:creationId xmlns:p14="http://schemas.microsoft.com/office/powerpoint/2010/main" val="4035021549"/>
       </p:ext>
     </p:extLst>
   </p:cSld>
@@ -861,7 +1043,11 @@
           <a:bodyPr/>
           <a:lstStyle/>
           <a:p>
-            <a:endParaRPr lang="ru-RU" dirty="0" smtClean="0"/>
+            <a:r>
+              <a:rPr lang="ru-RU" dirty="0" err="1" smtClean="0"/>
+              <a:t>яреек</a:t>
+            </a:r>
+            <a:endParaRPr lang="ru-RU" dirty="0"/>
           </a:p>
         </p:txBody>
       </p:sp>
@@ -891,7 +1077,359 @@
     </p:spTree>
     <p:extLst>
       <p:ext uri="{BB962C8B-B14F-4D97-AF65-F5344CB8AC3E}">
-        <p14:creationId xmlns:p14="http://schemas.microsoft.com/office/powerpoint/2010/main" val="39953359"/>
+        <p14:creationId xmlns:p14="http://schemas.microsoft.com/office/powerpoint/2010/main" val="4035021549"/>
+      </p:ext>
+    </p:extLst>
+  </p:cSld>
+  <p:clrMapOvr>
+    <a:masterClrMapping/>
+  </p:clrMapOvr>
+</p:notes>
+</file>
+
+<file path=ppt/notesSlides/notesSlide6.xml><?xml version="1.0" encoding="utf-8"?>
+<p:notes xmlns:a="http://schemas.openxmlformats.org/drawingml/2006/main" xmlns:r="http://schemas.openxmlformats.org/officeDocument/2006/relationships" xmlns:p="http://schemas.openxmlformats.org/presentationml/2006/main">
+  <p:cSld>
+    <p:spTree>
+      <p:nvGrpSpPr>
+        <p:cNvPr id="1" name=""/>
+        <p:cNvGrpSpPr/>
+        <p:nvPr/>
+      </p:nvGrpSpPr>
+      <p:grpSpPr>
+        <a:xfrm>
+          <a:off x="0" y="0"/>
+          <a:ext cx="0" cy="0"/>
+          <a:chOff x="0" y="0"/>
+          <a:chExt cx="0" cy="0"/>
+        </a:xfrm>
+      </p:grpSpPr>
+      <p:sp>
+        <p:nvSpPr>
+          <p:cNvPr id="2" name="Образ слайда 1"/>
+          <p:cNvSpPr>
+            <a:spLocks noGrp="1" noRot="1" noChangeAspect="1"/>
+          </p:cNvSpPr>
+          <p:nvPr>
+            <p:ph type="sldImg"/>
+          </p:nvPr>
+        </p:nvSpPr>
+        <p:spPr/>
+      </p:sp>
+      <p:sp>
+        <p:nvSpPr>
+          <p:cNvPr id="3" name="Заметки 2"/>
+          <p:cNvSpPr>
+            <a:spLocks noGrp="1"/>
+          </p:cNvSpPr>
+          <p:nvPr>
+            <p:ph type="body" idx="1"/>
+          </p:nvPr>
+        </p:nvSpPr>
+        <p:spPr/>
+        <p:txBody>
+          <a:bodyPr/>
+          <a:lstStyle/>
+          <a:p>
+            <a:r>
+              <a:rPr lang="ru-RU" dirty="0" err="1" smtClean="0"/>
+              <a:t>яреек</a:t>
+            </a:r>
+            <a:endParaRPr lang="ru-RU" dirty="0"/>
+          </a:p>
+        </p:txBody>
+      </p:sp>
+      <p:sp>
+        <p:nvSpPr>
+          <p:cNvPr id="4" name="Номер слайда 3"/>
+          <p:cNvSpPr>
+            <a:spLocks noGrp="1"/>
+          </p:cNvSpPr>
+          <p:nvPr>
+            <p:ph type="sldNum" sz="quarter" idx="10"/>
+          </p:nvPr>
+        </p:nvSpPr>
+        <p:spPr/>
+        <p:txBody>
+          <a:bodyPr/>
+          <a:lstStyle/>
+          <a:p>
+            <a:fld id="{51D3AA95-FC74-4EB0-8DAF-CC87085178D8}" type="slidenum">
+              <a:rPr lang="ru-RU" smtClean="0"/>
+              <a:t>7</a:t>
+            </a:fld>
+            <a:endParaRPr lang="ru-RU"/>
+          </a:p>
+        </p:txBody>
+      </p:sp>
+    </p:spTree>
+    <p:extLst>
+      <p:ext uri="{BB962C8B-B14F-4D97-AF65-F5344CB8AC3E}">
+        <p14:creationId xmlns:p14="http://schemas.microsoft.com/office/powerpoint/2010/main" val="1015952067"/>
+      </p:ext>
+    </p:extLst>
+  </p:cSld>
+  <p:clrMapOvr>
+    <a:masterClrMapping/>
+  </p:clrMapOvr>
+</p:notes>
+</file>
+
+<file path=ppt/notesSlides/notesSlide7.xml><?xml version="1.0" encoding="utf-8"?>
+<p:notes xmlns:a="http://schemas.openxmlformats.org/drawingml/2006/main" xmlns:r="http://schemas.openxmlformats.org/officeDocument/2006/relationships" xmlns:p="http://schemas.openxmlformats.org/presentationml/2006/main">
+  <p:cSld>
+    <p:spTree>
+      <p:nvGrpSpPr>
+        <p:cNvPr id="1" name=""/>
+        <p:cNvGrpSpPr/>
+        <p:nvPr/>
+      </p:nvGrpSpPr>
+      <p:grpSpPr>
+        <a:xfrm>
+          <a:off x="0" y="0"/>
+          <a:ext cx="0" cy="0"/>
+          <a:chOff x="0" y="0"/>
+          <a:chExt cx="0" cy="0"/>
+        </a:xfrm>
+      </p:grpSpPr>
+      <p:sp>
+        <p:nvSpPr>
+          <p:cNvPr id="2" name="Образ слайда 1"/>
+          <p:cNvSpPr>
+            <a:spLocks noGrp="1" noRot="1" noChangeAspect="1"/>
+          </p:cNvSpPr>
+          <p:nvPr>
+            <p:ph type="sldImg"/>
+          </p:nvPr>
+        </p:nvSpPr>
+        <p:spPr/>
+      </p:sp>
+      <p:sp>
+        <p:nvSpPr>
+          <p:cNvPr id="3" name="Заметки 2"/>
+          <p:cNvSpPr>
+            <a:spLocks noGrp="1"/>
+          </p:cNvSpPr>
+          <p:nvPr>
+            <p:ph type="body" idx="1"/>
+          </p:nvPr>
+        </p:nvSpPr>
+        <p:spPr/>
+        <p:txBody>
+          <a:bodyPr/>
+          <a:lstStyle/>
+          <a:p>
+            <a:r>
+              <a:rPr lang="ru-RU" dirty="0" err="1" smtClean="0"/>
+              <a:t>яреек</a:t>
+            </a:r>
+            <a:endParaRPr lang="ru-RU" dirty="0"/>
+          </a:p>
+        </p:txBody>
+      </p:sp>
+      <p:sp>
+        <p:nvSpPr>
+          <p:cNvPr id="4" name="Номер слайда 3"/>
+          <p:cNvSpPr>
+            <a:spLocks noGrp="1"/>
+          </p:cNvSpPr>
+          <p:nvPr>
+            <p:ph type="sldNum" sz="quarter" idx="10"/>
+          </p:nvPr>
+        </p:nvSpPr>
+        <p:spPr/>
+        <p:txBody>
+          <a:bodyPr/>
+          <a:lstStyle/>
+          <a:p>
+            <a:fld id="{51D3AA95-FC74-4EB0-8DAF-CC87085178D8}" type="slidenum">
+              <a:rPr lang="ru-RU" smtClean="0"/>
+              <a:t>8</a:t>
+            </a:fld>
+            <a:endParaRPr lang="ru-RU"/>
+          </a:p>
+        </p:txBody>
+      </p:sp>
+    </p:spTree>
+    <p:extLst>
+      <p:ext uri="{BB962C8B-B14F-4D97-AF65-F5344CB8AC3E}">
+        <p14:creationId xmlns:p14="http://schemas.microsoft.com/office/powerpoint/2010/main" val="1015952067"/>
+      </p:ext>
+    </p:extLst>
+  </p:cSld>
+  <p:clrMapOvr>
+    <a:masterClrMapping/>
+  </p:clrMapOvr>
+</p:notes>
+</file>
+
+<file path=ppt/notesSlides/notesSlide8.xml><?xml version="1.0" encoding="utf-8"?>
+<p:notes xmlns:a="http://schemas.openxmlformats.org/drawingml/2006/main" xmlns:r="http://schemas.openxmlformats.org/officeDocument/2006/relationships" xmlns:p="http://schemas.openxmlformats.org/presentationml/2006/main">
+  <p:cSld>
+    <p:spTree>
+      <p:nvGrpSpPr>
+        <p:cNvPr id="1" name=""/>
+        <p:cNvGrpSpPr/>
+        <p:nvPr/>
+      </p:nvGrpSpPr>
+      <p:grpSpPr>
+        <a:xfrm>
+          <a:off x="0" y="0"/>
+          <a:ext cx="0" cy="0"/>
+          <a:chOff x="0" y="0"/>
+          <a:chExt cx="0" cy="0"/>
+        </a:xfrm>
+      </p:grpSpPr>
+      <p:sp>
+        <p:nvSpPr>
+          <p:cNvPr id="2" name="Образ слайда 1"/>
+          <p:cNvSpPr>
+            <a:spLocks noGrp="1" noRot="1" noChangeAspect="1"/>
+          </p:cNvSpPr>
+          <p:nvPr>
+            <p:ph type="sldImg"/>
+          </p:nvPr>
+        </p:nvSpPr>
+        <p:spPr/>
+      </p:sp>
+      <p:sp>
+        <p:nvSpPr>
+          <p:cNvPr id="3" name="Заметки 2"/>
+          <p:cNvSpPr>
+            <a:spLocks noGrp="1"/>
+          </p:cNvSpPr>
+          <p:nvPr>
+            <p:ph type="body" idx="1"/>
+          </p:nvPr>
+        </p:nvSpPr>
+        <p:spPr/>
+        <p:txBody>
+          <a:bodyPr/>
+          <a:lstStyle/>
+          <a:p>
+            <a:r>
+              <a:rPr lang="ru-RU" dirty="0" err="1" smtClean="0"/>
+              <a:t>яреек</a:t>
+            </a:r>
+            <a:endParaRPr lang="ru-RU" dirty="0"/>
+          </a:p>
+        </p:txBody>
+      </p:sp>
+      <p:sp>
+        <p:nvSpPr>
+          <p:cNvPr id="4" name="Номер слайда 3"/>
+          <p:cNvSpPr>
+            <a:spLocks noGrp="1"/>
+          </p:cNvSpPr>
+          <p:nvPr>
+            <p:ph type="sldNum" sz="quarter" idx="10"/>
+          </p:nvPr>
+        </p:nvSpPr>
+        <p:spPr/>
+        <p:txBody>
+          <a:bodyPr/>
+          <a:lstStyle/>
+          <a:p>
+            <a:fld id="{51D3AA95-FC74-4EB0-8DAF-CC87085178D8}" type="slidenum">
+              <a:rPr lang="ru-RU" smtClean="0"/>
+              <a:t>9</a:t>
+            </a:fld>
+            <a:endParaRPr lang="ru-RU"/>
+          </a:p>
+        </p:txBody>
+      </p:sp>
+    </p:spTree>
+    <p:extLst>
+      <p:ext uri="{BB962C8B-B14F-4D97-AF65-F5344CB8AC3E}">
+        <p14:creationId xmlns:p14="http://schemas.microsoft.com/office/powerpoint/2010/main" val="1015952067"/>
+      </p:ext>
+    </p:extLst>
+  </p:cSld>
+  <p:clrMapOvr>
+    <a:masterClrMapping/>
+  </p:clrMapOvr>
+</p:notes>
+</file>
+
+<file path=ppt/notesSlides/notesSlide9.xml><?xml version="1.0" encoding="utf-8"?>
+<p:notes xmlns:a="http://schemas.openxmlformats.org/drawingml/2006/main" xmlns:r="http://schemas.openxmlformats.org/officeDocument/2006/relationships" xmlns:p="http://schemas.openxmlformats.org/presentationml/2006/main">
+  <p:cSld>
+    <p:spTree>
+      <p:nvGrpSpPr>
+        <p:cNvPr id="1" name=""/>
+        <p:cNvGrpSpPr/>
+        <p:nvPr/>
+      </p:nvGrpSpPr>
+      <p:grpSpPr>
+        <a:xfrm>
+          <a:off x="0" y="0"/>
+          <a:ext cx="0" cy="0"/>
+          <a:chOff x="0" y="0"/>
+          <a:chExt cx="0" cy="0"/>
+        </a:xfrm>
+      </p:grpSpPr>
+      <p:sp>
+        <p:nvSpPr>
+          <p:cNvPr id="2" name="Образ слайда 1"/>
+          <p:cNvSpPr>
+            <a:spLocks noGrp="1" noRot="1" noChangeAspect="1"/>
+          </p:cNvSpPr>
+          <p:nvPr>
+            <p:ph type="sldImg"/>
+          </p:nvPr>
+        </p:nvSpPr>
+        <p:spPr/>
+      </p:sp>
+      <p:sp>
+        <p:nvSpPr>
+          <p:cNvPr id="3" name="Заметки 2"/>
+          <p:cNvSpPr>
+            <a:spLocks noGrp="1"/>
+          </p:cNvSpPr>
+          <p:nvPr>
+            <p:ph type="body" idx="1"/>
+          </p:nvPr>
+        </p:nvSpPr>
+        <p:spPr/>
+        <p:txBody>
+          <a:bodyPr/>
+          <a:lstStyle/>
+          <a:p>
+            <a:r>
+              <a:rPr lang="ru-RU" dirty="0" err="1" smtClean="0"/>
+              <a:t>яреек</a:t>
+            </a:r>
+            <a:endParaRPr lang="ru-RU" dirty="0"/>
+          </a:p>
+        </p:txBody>
+      </p:sp>
+      <p:sp>
+        <p:nvSpPr>
+          <p:cNvPr id="4" name="Номер слайда 3"/>
+          <p:cNvSpPr>
+            <a:spLocks noGrp="1"/>
+          </p:cNvSpPr>
+          <p:nvPr>
+            <p:ph type="sldNum" sz="quarter" idx="10"/>
+          </p:nvPr>
+        </p:nvSpPr>
+        <p:spPr/>
+        <p:txBody>
+          <a:bodyPr/>
+          <a:lstStyle/>
+          <a:p>
+            <a:fld id="{51D3AA95-FC74-4EB0-8DAF-CC87085178D8}" type="slidenum">
+              <a:rPr lang="ru-RU" smtClean="0"/>
+              <a:t>10</a:t>
+            </a:fld>
+            <a:endParaRPr lang="ru-RU"/>
+          </a:p>
+        </p:txBody>
+      </p:sp>
+    </p:spTree>
+    <p:extLst>
+      <p:ext uri="{BB962C8B-B14F-4D97-AF65-F5344CB8AC3E}">
+        <p14:creationId xmlns:p14="http://schemas.microsoft.com/office/powerpoint/2010/main" val="1015952067"/>
       </p:ext>
     </p:extLst>
   </p:cSld>
@@ -1082,7 +1620,7 @@
           <a:p>
             <a:fld id="{79520D73-3334-4ADB-ADA2-7270C53DE40E}" type="datetimeFigureOut">
               <a:rPr lang="ru-RU" smtClean="0"/>
-              <a:t>10.05.2026</a:t>
+              <a:t>18.05.2026</a:t>
             </a:fld>
             <a:endParaRPr lang="ru-RU"/>
           </a:p>
@@ -1252,7 +1790,7 @@
           <a:p>
             <a:fld id="{79520D73-3334-4ADB-ADA2-7270C53DE40E}" type="datetimeFigureOut">
               <a:rPr lang="ru-RU" smtClean="0"/>
-              <a:t>10.05.2026</a:t>
+              <a:t>18.05.2026</a:t>
             </a:fld>
             <a:endParaRPr lang="ru-RU"/>
           </a:p>
@@ -1432,7 +1970,7 @@
           <a:p>
             <a:fld id="{79520D73-3334-4ADB-ADA2-7270C53DE40E}" type="datetimeFigureOut">
               <a:rPr lang="ru-RU" smtClean="0"/>
-              <a:t>10.05.2026</a:t>
+              <a:t>18.05.2026</a:t>
             </a:fld>
             <a:endParaRPr lang="ru-RU"/>
           </a:p>
@@ -1602,7 +2140,7 @@
           <a:p>
             <a:fld id="{79520D73-3334-4ADB-ADA2-7270C53DE40E}" type="datetimeFigureOut">
               <a:rPr lang="ru-RU" smtClean="0"/>
-              <a:t>10.05.2026</a:t>
+              <a:t>18.05.2026</a:t>
             </a:fld>
             <a:endParaRPr lang="ru-RU"/>
           </a:p>
@@ -1848,7 +2386,7 @@
           <a:p>
             <a:fld id="{79520D73-3334-4ADB-ADA2-7270C53DE40E}" type="datetimeFigureOut">
               <a:rPr lang="ru-RU" smtClean="0"/>
-              <a:t>10.05.2026</a:t>
+              <a:t>18.05.2026</a:t>
             </a:fld>
             <a:endParaRPr lang="ru-RU"/>
           </a:p>
@@ -2136,7 +2674,7 @@
           <a:p>
             <a:fld id="{79520D73-3334-4ADB-ADA2-7270C53DE40E}" type="datetimeFigureOut">
               <a:rPr lang="ru-RU" smtClean="0"/>
-              <a:t>10.05.2026</a:t>
+              <a:t>18.05.2026</a:t>
             </a:fld>
             <a:endParaRPr lang="ru-RU"/>
           </a:p>
@@ -2558,7 +3096,7 @@
           <a:p>
             <a:fld id="{79520D73-3334-4ADB-ADA2-7270C53DE40E}" type="datetimeFigureOut">
               <a:rPr lang="ru-RU" smtClean="0"/>
-              <a:t>10.05.2026</a:t>
+              <a:t>18.05.2026</a:t>
             </a:fld>
             <a:endParaRPr lang="ru-RU"/>
           </a:p>
@@ -2676,7 +3214,7 @@
           <a:p>
             <a:fld id="{79520D73-3334-4ADB-ADA2-7270C53DE40E}" type="datetimeFigureOut">
               <a:rPr lang="ru-RU" smtClean="0"/>
-              <a:t>10.05.2026</a:t>
+              <a:t>18.05.2026</a:t>
             </a:fld>
             <a:endParaRPr lang="ru-RU"/>
           </a:p>
@@ -2771,7 +3309,7 @@
           <a:p>
             <a:fld id="{79520D73-3334-4ADB-ADA2-7270C53DE40E}" type="datetimeFigureOut">
               <a:rPr lang="ru-RU" smtClean="0"/>
-              <a:t>10.05.2026</a:t>
+              <a:t>18.05.2026</a:t>
             </a:fld>
             <a:endParaRPr lang="ru-RU"/>
           </a:p>
@@ -3048,7 +3586,7 @@
           <a:p>
             <a:fld id="{79520D73-3334-4ADB-ADA2-7270C53DE40E}" type="datetimeFigureOut">
               <a:rPr lang="ru-RU" smtClean="0"/>
-              <a:t>10.05.2026</a:t>
+              <a:t>18.05.2026</a:t>
             </a:fld>
             <a:endParaRPr lang="ru-RU"/>
           </a:p>
@@ -3301,7 +3839,7 @@
           <a:p>
             <a:fld id="{79520D73-3334-4ADB-ADA2-7270C53DE40E}" type="datetimeFigureOut">
               <a:rPr lang="ru-RU" smtClean="0"/>
-              <a:t>10.05.2026</a:t>
+              <a:t>18.05.2026</a:t>
             </a:fld>
             <a:endParaRPr lang="ru-RU"/>
           </a:p>
@@ -3517,7 +4055,7 @@
           <a:p>
             <a:fld id="{79520D73-3334-4ADB-ADA2-7270C53DE40E}" type="datetimeFigureOut">
               <a:rPr lang="ru-RU" smtClean="0"/>
-              <a:t>10.05.2026</a:t>
+              <a:t>18.05.2026</a:t>
             </a:fld>
             <a:endParaRPr lang="ru-RU"/>
           </a:p>
@@ -4110,7 +4648,7 @@
 </p:sld>
 </file>
 
-<file path=ppt/slides/slide2.xml><?xml version="1.0" encoding="utf-8"?>
+<file path=ppt/slides/slide10.xml><?xml version="1.0" encoding="utf-8"?>
 <p:sld xmlns:a="http://schemas.openxmlformats.org/drawingml/2006/main" xmlns:r="http://schemas.openxmlformats.org/officeDocument/2006/relationships" xmlns:p="http://schemas.openxmlformats.org/presentationml/2006/main">
   <p:cSld>
     <p:spTree>
@@ -4127,6 +4665,58 @@
           <a:chExt cx="0" cy="0"/>
         </a:xfrm>
       </p:grpSpPr>
+      <p:sp>
+        <p:nvSpPr>
+          <p:cNvPr id="5" name="Прямоугольник 4"/>
+          <p:cNvSpPr/>
+          <p:nvPr/>
+        </p:nvSpPr>
+        <p:spPr>
+          <a:xfrm>
+            <a:off x="0" y="1124744"/>
+            <a:ext cx="9144000" cy="584775"/>
+          </a:xfrm>
+          <a:prstGeom prst="rect">
+            <a:avLst/>
+          </a:prstGeom>
+          <a:solidFill>
+            <a:srgbClr val="0D0C16"/>
+          </a:solidFill>
+          <a:ln>
+            <a:solidFill>
+              <a:schemeClr val="bg1"/>
+            </a:solidFill>
+          </a:ln>
+        </p:spPr>
+        <p:style>
+          <a:lnRef idx="2">
+            <a:schemeClr val="accent1">
+              <a:shade val="50000"/>
+            </a:schemeClr>
+          </a:lnRef>
+          <a:fillRef idx="1">
+            <a:schemeClr val="accent1"/>
+          </a:fillRef>
+          <a:effectRef idx="0">
+            <a:schemeClr val="accent1"/>
+          </a:effectRef>
+          <a:fontRef idx="minor">
+            <a:schemeClr val="lt1"/>
+          </a:fontRef>
+        </p:style>
+        <p:txBody>
+          <a:bodyPr rtlCol="0" anchor="ctr"/>
+          <a:lstStyle/>
+          <a:p>
+            <a:pPr algn="ctr"/>
+            <a:endParaRPr lang="ru-RU">
+              <a:solidFill>
+                <a:schemeClr val="bg1"/>
+              </a:solidFill>
+            </a:endParaRPr>
+          </a:p>
+        </p:txBody>
+      </p:sp>
       <p:sp>
         <p:nvSpPr>
           <p:cNvPr id="7" name="Прямоугольник 6"/>
@@ -4181,6 +4771,837 @@
         </p:nvSpPr>
         <p:spPr>
           <a:xfrm>
+            <a:off x="625540" y="208429"/>
+            <a:ext cx="8915012" cy="707886"/>
+          </a:xfrm>
+          <a:prstGeom prst="rect">
+            <a:avLst/>
+          </a:prstGeom>
+          <a:noFill/>
+        </p:spPr>
+        <p:txBody>
+          <a:bodyPr wrap="square" rtlCol="0">
+            <a:spAutoFit/>
+          </a:bodyPr>
+          <a:lstStyle/>
+          <a:p>
+            <a:r>
+              <a:rPr lang="en-US" sz="4000" b="1" dirty="0" smtClean="0">
+                <a:solidFill>
+                  <a:schemeClr val="bg1"/>
+                </a:solidFill>
+              </a:rPr>
+              <a:t>M</a:t>
+            </a:r>
+            <a:r>
+              <a:rPr lang="en-US" sz="4000" b="1" dirty="0" smtClean="0"/>
+              <a:t>ACHINE</a:t>
+            </a:r>
+            <a:r>
+              <a:rPr lang="en-US" sz="4000" b="1" dirty="0" smtClean="0">
+                <a:solidFill>
+                  <a:schemeClr val="bg1"/>
+                </a:solidFill>
+              </a:rPr>
+              <a:t> L</a:t>
+            </a:r>
+            <a:r>
+              <a:rPr lang="en-US" sz="4000" b="1" dirty="0" smtClean="0"/>
+              <a:t>EARNING</a:t>
+            </a:r>
+            <a:r>
+              <a:rPr lang="en-US" sz="4000" b="1" dirty="0" smtClean="0">
+                <a:solidFill>
+                  <a:schemeClr val="bg1"/>
+                </a:solidFill>
+              </a:rPr>
+              <a:t> </a:t>
+            </a:r>
+            <a:r>
+              <a:rPr lang="ru-RU" sz="4000" b="1" dirty="0" smtClean="0">
+                <a:solidFill>
+                  <a:schemeClr val="bg1"/>
+                </a:solidFill>
+              </a:rPr>
+              <a:t>МЕТОДЫ</a:t>
+            </a:r>
+            <a:endParaRPr lang="ru-RU" sz="4000" b="1" dirty="0">
+              <a:solidFill>
+                <a:schemeClr val="bg1"/>
+              </a:solidFill>
+            </a:endParaRPr>
+          </a:p>
+        </p:txBody>
+      </p:sp>
+      <p:sp>
+        <p:nvSpPr>
+          <p:cNvPr id="3" name="TextBox 2"/>
+          <p:cNvSpPr txBox="1"/>
+          <p:nvPr/>
+        </p:nvSpPr>
+        <p:spPr>
+          <a:xfrm>
+            <a:off x="625540" y="1124744"/>
+            <a:ext cx="4245586" cy="584775"/>
+          </a:xfrm>
+          <a:prstGeom prst="rect">
+            <a:avLst/>
+          </a:prstGeom>
+          <a:noFill/>
+        </p:spPr>
+        <p:txBody>
+          <a:bodyPr wrap="none" rtlCol="0">
+            <a:spAutoFit/>
+          </a:bodyPr>
+          <a:lstStyle/>
+          <a:p>
+            <a:r>
+              <a:rPr lang="en-US" sz="3200" b="1" dirty="0" smtClean="0">
+                <a:solidFill>
+                  <a:schemeClr val="bg1"/>
+                </a:solidFill>
+              </a:rPr>
+              <a:t>LOCAL OUTLIER FACTOR</a:t>
+            </a:r>
+            <a:endParaRPr lang="ru-RU" sz="3200" b="1" dirty="0">
+              <a:solidFill>
+                <a:schemeClr val="bg1"/>
+              </a:solidFill>
+            </a:endParaRPr>
+          </a:p>
+        </p:txBody>
+      </p:sp>
+      <p:pic>
+        <p:nvPicPr>
+          <p:cNvPr id="10" name="Рисунок 9"/>
+          <p:cNvPicPr>
+            <a:picLocks noChangeAspect="1"/>
+          </p:cNvPicPr>
+          <p:nvPr/>
+        </p:nvPicPr>
+        <p:blipFill>
+          <a:blip r:embed="rId3">
+            <a:extLst>
+              <a:ext uri="{28A0092B-C50C-407E-A947-70E740481C1C}">
+                <a14:useLocalDpi xmlns:a14="http://schemas.microsoft.com/office/drawing/2010/main" val="0"/>
+              </a:ext>
+            </a:extLst>
+          </a:blip>
+          <a:stretch>
+            <a:fillRect/>
+          </a:stretch>
+        </p:blipFill>
+        <p:spPr>
+          <a:xfrm>
+            <a:off x="480126" y="1945580"/>
+            <a:ext cx="5772334" cy="4700207"/>
+          </a:xfrm>
+          <a:prstGeom prst="rect">
+            <a:avLst/>
+          </a:prstGeom>
+        </p:spPr>
+      </p:pic>
+      <p:sp>
+        <p:nvSpPr>
+          <p:cNvPr id="11" name="TextBox 10"/>
+          <p:cNvSpPr txBox="1"/>
+          <p:nvPr/>
+        </p:nvSpPr>
+        <p:spPr>
+          <a:xfrm>
+            <a:off x="6437263" y="4291226"/>
+            <a:ext cx="2578309" cy="584775"/>
+          </a:xfrm>
+          <a:prstGeom prst="rect">
+            <a:avLst/>
+          </a:prstGeom>
+          <a:solidFill>
+            <a:srgbClr val="6D68CC"/>
+          </a:solidFill>
+        </p:spPr>
+        <p:txBody>
+          <a:bodyPr wrap="square" rtlCol="0">
+            <a:spAutoFit/>
+          </a:bodyPr>
+          <a:lstStyle/>
+          <a:p>
+            <a:pPr algn="ctr"/>
+            <a:r>
+              <a:rPr lang="en-US" sz="3200" b="1" dirty="0" smtClean="0">
+                <a:solidFill>
+                  <a:schemeClr val="bg1"/>
+                </a:solidFill>
+              </a:rPr>
+              <a:t>F1 score: 1</a:t>
+            </a:r>
+            <a:endParaRPr lang="ru-RU" sz="3200" b="1" dirty="0">
+              <a:solidFill>
+                <a:schemeClr val="bg1"/>
+              </a:solidFill>
+            </a:endParaRPr>
+          </a:p>
+        </p:txBody>
+      </p:sp>
+      <mc:AlternateContent xmlns:mc="http://schemas.openxmlformats.org/markup-compatibility/2006">
+        <mc:Choice xmlns:a14="http://schemas.microsoft.com/office/drawing/2010/main" Requires="a14">
+          <p:sp>
+            <p:nvSpPr>
+              <p:cNvPr id="12" name="TextBox 11"/>
+              <p:cNvSpPr txBox="1"/>
+              <p:nvPr/>
+            </p:nvSpPr>
+            <p:spPr>
+              <a:xfrm>
+                <a:off x="6444208" y="3438451"/>
+                <a:ext cx="2564420" cy="584775"/>
+              </a:xfrm>
+              <a:prstGeom prst="rect">
+                <a:avLst/>
+              </a:prstGeom>
+              <a:noFill/>
+            </p:spPr>
+            <p:txBody>
+              <a:bodyPr wrap="none" rtlCol="0">
+                <a:spAutoFit/>
+              </a:bodyPr>
+              <a:lstStyle/>
+              <a:p>
+                <a:r>
+                  <a:rPr lang="en-US" sz="3200" b="1" dirty="0" smtClean="0">
+                    <a:solidFill>
+                      <a:schemeClr val="bg1"/>
+                    </a:solidFill>
+                  </a:rPr>
+                  <a:t>y </a:t>
+                </a:r>
+                <a14:m>
+                  <m:oMath xmlns:m="http://schemas.openxmlformats.org/officeDocument/2006/math">
+                    <m:r>
+                      <a:rPr lang="en-US" sz="3200" b="1" i="0" smtClean="0">
+                        <a:solidFill>
+                          <a:schemeClr val="bg1"/>
+                        </a:solidFill>
+                      </a:rPr>
+                      <m:t>=</m:t>
+                    </m:r>
+                    <m:func>
+                      <m:funcPr>
+                        <m:ctrlPr>
+                          <a:rPr lang="en-US" sz="3200" b="1" i="1" smtClean="0">
+                            <a:solidFill>
+                              <a:schemeClr val="bg1"/>
+                            </a:solidFill>
+                          </a:rPr>
+                        </m:ctrlPr>
+                      </m:funcPr>
+                      <m:fName>
+                        <m:r>
+                          <a:rPr lang="en-US" sz="3200" b="1" i="0" smtClean="0">
+                            <a:solidFill>
+                              <a:schemeClr val="bg1"/>
+                            </a:solidFill>
+                          </a:rPr>
+                          <m:t>𝐜𝐨𝐬</m:t>
+                        </m:r>
+                      </m:fName>
+                      <m:e>
+                        <m:r>
+                          <a:rPr lang="en-US" sz="3200" b="1" i="1" smtClean="0">
+                            <a:solidFill>
+                              <a:schemeClr val="bg1"/>
+                            </a:solidFill>
+                          </a:rPr>
+                          <m:t>𝒙</m:t>
+                        </m:r>
+                      </m:e>
+                    </m:func>
+                    <m:r>
+                      <a:rPr lang="en-US" sz="3200" b="1" i="0" smtClean="0">
+                        <a:solidFill>
+                          <a:schemeClr val="bg1"/>
+                        </a:solidFill>
+                      </a:rPr>
+                      <m:t>+</m:t>
+                    </m:r>
+                    <m:r>
+                      <a:rPr lang="en-US" sz="3200" b="1" i="0" smtClean="0">
+                        <a:solidFill>
+                          <a:schemeClr val="bg1"/>
+                        </a:solidFill>
+                      </a:rPr>
+                      <m:t>𝟏</m:t>
+                    </m:r>
+                  </m:oMath>
+                </a14:m>
+                <a:endParaRPr lang="ru-RU" sz="3200" b="1" dirty="0"/>
+              </a:p>
+            </p:txBody>
+          </p:sp>
+        </mc:Choice>
+        <mc:Fallback>
+          <p:sp>
+            <p:nvSpPr>
+              <p:cNvPr id="12" name="TextBox 11"/>
+              <p:cNvSpPr txBox="1">
+                <a:spLocks noRot="1" noChangeAspect="1" noMove="1" noResize="1" noEditPoints="1" noAdjustHandles="1" noChangeArrowheads="1" noChangeShapeType="1" noTextEdit="1"/>
+              </p:cNvSpPr>
+              <p:nvPr/>
+            </p:nvSpPr>
+            <p:spPr>
+              <a:xfrm>
+                <a:off x="6444208" y="3438451"/>
+                <a:ext cx="2564420" cy="584775"/>
+              </a:xfrm>
+              <a:prstGeom prst="rect">
+                <a:avLst/>
+              </a:prstGeom>
+              <a:blipFill rotWithShape="1">
+                <a:blip r:embed="rId4"/>
+                <a:stretch>
+                  <a:fillRect l="-5938" t="-12500" b="-34375"/>
+                </a:stretch>
+              </a:blipFill>
+            </p:spPr>
+            <p:txBody>
+              <a:bodyPr/>
+              <a:lstStyle/>
+              <a:p>
+                <a:r>
+                  <a:rPr lang="ru-RU">
+                    <a:noFill/>
+                  </a:rPr>
+                  <a:t> </a:t>
+                </a:r>
+              </a:p>
+            </p:txBody>
+          </p:sp>
+        </mc:Fallback>
+      </mc:AlternateContent>
+    </p:spTree>
+    <p:extLst>
+      <p:ext uri="{BB962C8B-B14F-4D97-AF65-F5344CB8AC3E}">
+        <p14:creationId xmlns:p14="http://schemas.microsoft.com/office/powerpoint/2010/main" val="860543783"/>
+      </p:ext>
+    </p:extLst>
+  </p:cSld>
+  <p:clrMapOvr>
+    <a:masterClrMapping/>
+  </p:clrMapOvr>
+  <p:timing>
+    <p:tnLst>
+      <p:par>
+        <p:cTn id="1" dur="indefinite" restart="never" nodeType="tmRoot"/>
+      </p:par>
+    </p:tnLst>
+  </p:timing>
+</p:sld>
+</file>
+
+<file path=ppt/slides/slide11.xml><?xml version="1.0" encoding="utf-8"?>
+<p:sld xmlns:a="http://schemas.openxmlformats.org/drawingml/2006/main" xmlns:r="http://schemas.openxmlformats.org/officeDocument/2006/relationships" xmlns:p="http://schemas.openxmlformats.org/presentationml/2006/main">
+  <p:cSld>
+    <p:spTree>
+      <p:nvGrpSpPr>
+        <p:cNvPr id="1" name=""/>
+        <p:cNvGrpSpPr/>
+        <p:nvPr/>
+      </p:nvGrpSpPr>
+      <p:grpSpPr>
+        <a:xfrm>
+          <a:off x="0" y="0"/>
+          <a:ext cx="0" cy="0"/>
+          <a:chOff x="0" y="0"/>
+          <a:chExt cx="0" cy="0"/>
+        </a:xfrm>
+      </p:grpSpPr>
+      <p:sp>
+        <p:nvSpPr>
+          <p:cNvPr id="7" name="Прямоугольник 6"/>
+          <p:cNvSpPr/>
+          <p:nvPr/>
+        </p:nvSpPr>
+        <p:spPr>
+          <a:xfrm>
+            <a:off x="0" y="0"/>
+            <a:ext cx="9144000" cy="1124744"/>
+          </a:xfrm>
+          <a:prstGeom prst="rect">
+            <a:avLst/>
+          </a:prstGeom>
+          <a:solidFill>
+            <a:srgbClr val="6D68CC"/>
+          </a:solidFill>
+          <a:ln>
+            <a:noFill/>
+          </a:ln>
+        </p:spPr>
+        <p:style>
+          <a:lnRef idx="2">
+            <a:schemeClr val="accent1">
+              <a:shade val="50000"/>
+            </a:schemeClr>
+          </a:lnRef>
+          <a:fillRef idx="1">
+            <a:schemeClr val="accent1"/>
+          </a:fillRef>
+          <a:effectRef idx="0">
+            <a:schemeClr val="accent1"/>
+          </a:effectRef>
+          <a:fontRef idx="minor">
+            <a:schemeClr val="lt1"/>
+          </a:fontRef>
+        </p:style>
+        <p:txBody>
+          <a:bodyPr rtlCol="0" anchor="ctr"/>
+          <a:lstStyle/>
+          <a:p>
+            <a:pPr algn="ctr"/>
+            <a:endParaRPr lang="ru-RU"/>
+          </a:p>
+        </p:txBody>
+      </p:sp>
+      <p:sp>
+        <p:nvSpPr>
+          <p:cNvPr id="2" name="TextBox 1"/>
+          <p:cNvSpPr txBox="1"/>
+          <p:nvPr/>
+        </p:nvSpPr>
+        <p:spPr>
+          <a:xfrm>
+            <a:off x="611560" y="208429"/>
+            <a:ext cx="8915012" cy="707886"/>
+          </a:xfrm>
+          <a:prstGeom prst="rect">
+            <a:avLst/>
+          </a:prstGeom>
+          <a:noFill/>
+        </p:spPr>
+        <p:txBody>
+          <a:bodyPr wrap="square" rtlCol="0">
+            <a:spAutoFit/>
+          </a:bodyPr>
+          <a:lstStyle/>
+          <a:p>
+            <a:r>
+              <a:rPr lang="ru-RU" sz="4000" b="1" dirty="0" smtClean="0">
+                <a:solidFill>
+                  <a:schemeClr val="bg1"/>
+                </a:solidFill>
+              </a:rPr>
+              <a:t>ПОЛЬЗОВАТЕЛЬСКИЙ ИНТЕРФЕЙС</a:t>
+            </a:r>
+            <a:endParaRPr lang="ru-RU" sz="4000" b="1" dirty="0">
+              <a:solidFill>
+                <a:schemeClr val="bg1"/>
+              </a:solidFill>
+            </a:endParaRPr>
+          </a:p>
+        </p:txBody>
+      </p:sp>
+      <p:pic>
+        <p:nvPicPr>
+          <p:cNvPr id="3" name="Рисунок 2"/>
+          <p:cNvPicPr>
+            <a:picLocks noChangeAspect="1"/>
+          </p:cNvPicPr>
+          <p:nvPr/>
+        </p:nvPicPr>
+        <p:blipFill rotWithShape="1">
+          <a:blip r:embed="rId3">
+            <a:extLst>
+              <a:ext uri="{28A0092B-C50C-407E-A947-70E740481C1C}">
+                <a14:useLocalDpi xmlns:a14="http://schemas.microsoft.com/office/drawing/2010/main" val="0"/>
+              </a:ext>
+            </a:extLst>
+          </a:blip>
+          <a:srcRect b="929"/>
+          <a:stretch/>
+        </p:blipFill>
+        <p:spPr>
+          <a:xfrm>
+            <a:off x="733158" y="1606393"/>
+            <a:ext cx="7799282" cy="4820285"/>
+          </a:xfrm>
+          <a:prstGeom prst="rect">
+            <a:avLst/>
+          </a:prstGeom>
+        </p:spPr>
+      </p:pic>
+    </p:spTree>
+    <p:extLst>
+      <p:ext uri="{BB962C8B-B14F-4D97-AF65-F5344CB8AC3E}">
+        <p14:creationId xmlns:p14="http://schemas.microsoft.com/office/powerpoint/2010/main" val="3090627775"/>
+      </p:ext>
+    </p:extLst>
+  </p:cSld>
+  <p:clrMapOvr>
+    <a:masterClrMapping/>
+  </p:clrMapOvr>
+  <p:timing>
+    <p:tnLst>
+      <p:par>
+        <p:cTn id="1" dur="indefinite" restart="never" nodeType="tmRoot"/>
+      </p:par>
+    </p:tnLst>
+  </p:timing>
+</p:sld>
+</file>
+
+<file path=ppt/slides/slide12.xml><?xml version="1.0" encoding="utf-8"?>
+<p:sld xmlns:a="http://schemas.openxmlformats.org/drawingml/2006/main" xmlns:r="http://schemas.openxmlformats.org/officeDocument/2006/relationships" xmlns:p="http://schemas.openxmlformats.org/presentationml/2006/main">
+  <p:cSld>
+    <p:spTree>
+      <p:nvGrpSpPr>
+        <p:cNvPr id="1" name=""/>
+        <p:cNvGrpSpPr/>
+        <p:nvPr/>
+      </p:nvGrpSpPr>
+      <p:grpSpPr>
+        <a:xfrm>
+          <a:off x="0" y="0"/>
+          <a:ext cx="0" cy="0"/>
+          <a:chOff x="0" y="0"/>
+          <a:chExt cx="0" cy="0"/>
+        </a:xfrm>
+      </p:grpSpPr>
+      <p:sp>
+        <p:nvSpPr>
+          <p:cNvPr id="7" name="Прямоугольник 6"/>
+          <p:cNvSpPr/>
+          <p:nvPr/>
+        </p:nvSpPr>
+        <p:spPr>
+          <a:xfrm>
+            <a:off x="0" y="0"/>
+            <a:ext cx="9144000" cy="1124744"/>
+          </a:xfrm>
+          <a:prstGeom prst="rect">
+            <a:avLst/>
+          </a:prstGeom>
+          <a:solidFill>
+            <a:srgbClr val="6D68CC"/>
+          </a:solidFill>
+          <a:ln>
+            <a:noFill/>
+          </a:ln>
+        </p:spPr>
+        <p:style>
+          <a:lnRef idx="2">
+            <a:schemeClr val="accent1">
+              <a:shade val="50000"/>
+            </a:schemeClr>
+          </a:lnRef>
+          <a:fillRef idx="1">
+            <a:schemeClr val="accent1"/>
+          </a:fillRef>
+          <a:effectRef idx="0">
+            <a:schemeClr val="accent1"/>
+          </a:effectRef>
+          <a:fontRef idx="minor">
+            <a:schemeClr val="lt1"/>
+          </a:fontRef>
+        </p:style>
+        <p:txBody>
+          <a:bodyPr rtlCol="0" anchor="ctr"/>
+          <a:lstStyle/>
+          <a:p>
+            <a:pPr algn="ctr"/>
+            <a:endParaRPr lang="ru-RU"/>
+          </a:p>
+        </p:txBody>
+      </p:sp>
+      <p:sp>
+        <p:nvSpPr>
+          <p:cNvPr id="2" name="TextBox 1"/>
+          <p:cNvSpPr txBox="1"/>
+          <p:nvPr/>
+        </p:nvSpPr>
+        <p:spPr>
+          <a:xfrm>
+            <a:off x="611560" y="208429"/>
+            <a:ext cx="8915012" cy="707886"/>
+          </a:xfrm>
+          <a:prstGeom prst="rect">
+            <a:avLst/>
+          </a:prstGeom>
+          <a:noFill/>
+        </p:spPr>
+        <p:txBody>
+          <a:bodyPr wrap="square" rtlCol="0">
+            <a:spAutoFit/>
+          </a:bodyPr>
+          <a:lstStyle/>
+          <a:p>
+            <a:r>
+              <a:rPr lang="ru-RU" sz="4000" b="1" dirty="0" smtClean="0">
+                <a:solidFill>
+                  <a:schemeClr val="bg1"/>
+                </a:solidFill>
+              </a:rPr>
+              <a:t>ПОЛЬЗОВАТЕЛЬСКИЙ ИНТЕРФЕЙС</a:t>
+            </a:r>
+            <a:endParaRPr lang="ru-RU" sz="4000" b="1" dirty="0">
+              <a:solidFill>
+                <a:schemeClr val="bg1"/>
+              </a:solidFill>
+            </a:endParaRPr>
+          </a:p>
+        </p:txBody>
+      </p:sp>
+      <p:sp>
+        <p:nvSpPr>
+          <p:cNvPr id="5" name="TextBox 4"/>
+          <p:cNvSpPr txBox="1"/>
+          <p:nvPr/>
+        </p:nvSpPr>
+        <p:spPr>
+          <a:xfrm>
+            <a:off x="323528" y="1484784"/>
+            <a:ext cx="8496944" cy="4524315"/>
+          </a:xfrm>
+          <a:prstGeom prst="rect">
+            <a:avLst/>
+          </a:prstGeom>
+          <a:noFill/>
+        </p:spPr>
+        <p:txBody>
+          <a:bodyPr wrap="square" rtlCol="0">
+            <a:spAutoFit/>
+          </a:bodyPr>
+          <a:lstStyle/>
+          <a:p>
+            <a:r>
+              <a:rPr lang="en-US" sz="3200" dirty="0" smtClean="0">
+                <a:solidFill>
+                  <a:srgbClr val="6D68CC"/>
+                </a:solidFill>
+              </a:rPr>
+              <a:t>&gt;</a:t>
+            </a:r>
+            <a:r>
+              <a:rPr lang="en-US" sz="3200" dirty="0" smtClean="0">
+                <a:solidFill>
+                  <a:schemeClr val="bg1"/>
+                </a:solidFill>
+              </a:rPr>
+              <a:t> </a:t>
+            </a:r>
+            <a:r>
+              <a:rPr lang="ru-RU" sz="3200" dirty="0" smtClean="0">
+                <a:solidFill>
+                  <a:schemeClr val="bg1"/>
+                </a:solidFill>
+              </a:rPr>
+              <a:t>Детальная настройка параметров функции, шума и выбросов</a:t>
+            </a:r>
+          </a:p>
+          <a:p>
+            <a:r>
+              <a:rPr lang="ru-RU" sz="3200" dirty="0" smtClean="0">
+                <a:solidFill>
+                  <a:schemeClr val="bg1"/>
+                </a:solidFill>
+              </a:rPr>
+              <a:t> </a:t>
+            </a:r>
+          </a:p>
+          <a:p>
+            <a:r>
+              <a:rPr lang="en-US" sz="3200" dirty="0" smtClean="0">
+                <a:solidFill>
+                  <a:srgbClr val="6D68CC"/>
+                </a:solidFill>
+              </a:rPr>
+              <a:t>&gt;</a:t>
+            </a:r>
+            <a:r>
+              <a:rPr lang="en-US" sz="3200" dirty="0" smtClean="0">
+                <a:solidFill>
+                  <a:schemeClr val="bg1"/>
+                </a:solidFill>
+              </a:rPr>
+              <a:t> </a:t>
+            </a:r>
+            <a:r>
+              <a:rPr lang="ru-RU" sz="3200" dirty="0" smtClean="0">
+                <a:solidFill>
+                  <a:schemeClr val="bg1"/>
+                </a:solidFill>
+              </a:rPr>
+              <a:t>Разными цветами выделяются на графике аномальные точки: сгенерированные, найденные статистическим и </a:t>
+            </a:r>
+            <a:r>
+              <a:rPr lang="en-US" sz="3200" dirty="0" smtClean="0">
+                <a:solidFill>
+                  <a:schemeClr val="bg1"/>
+                </a:solidFill>
+              </a:rPr>
+              <a:t>ML </a:t>
+            </a:r>
+            <a:r>
+              <a:rPr lang="ru-RU" sz="3200" dirty="0" smtClean="0">
+                <a:solidFill>
+                  <a:schemeClr val="bg1"/>
+                </a:solidFill>
+              </a:rPr>
+              <a:t>методами.</a:t>
+            </a:r>
+          </a:p>
+          <a:p>
+            <a:endParaRPr lang="ru-RU" sz="3200" dirty="0" smtClean="0">
+              <a:solidFill>
+                <a:schemeClr val="bg1"/>
+              </a:solidFill>
+            </a:endParaRPr>
+          </a:p>
+          <a:p>
+            <a:r>
+              <a:rPr lang="en-US" sz="3200" dirty="0" smtClean="0">
+                <a:solidFill>
+                  <a:srgbClr val="6D68CC"/>
+                </a:solidFill>
+              </a:rPr>
+              <a:t>&gt;</a:t>
+            </a:r>
+            <a:r>
+              <a:rPr lang="en-US" sz="3200" dirty="0" smtClean="0">
+                <a:solidFill>
+                  <a:schemeClr val="bg1"/>
+                </a:solidFill>
+              </a:rPr>
+              <a:t> </a:t>
+            </a:r>
+            <a:r>
+              <a:rPr lang="ru-RU" sz="3200" dirty="0" smtClean="0">
+                <a:solidFill>
+                  <a:schemeClr val="bg1"/>
+                </a:solidFill>
+              </a:rPr>
+              <a:t>Отображается сама функция и </a:t>
+            </a:r>
+            <a:r>
+              <a:rPr lang="en-US" sz="3200" dirty="0" smtClean="0">
+                <a:solidFill>
+                  <a:schemeClr val="bg1"/>
+                </a:solidFill>
+              </a:rPr>
+              <a:t>F1</a:t>
+            </a:r>
+            <a:r>
+              <a:rPr lang="ru-RU" sz="3200" dirty="0">
+                <a:solidFill>
+                  <a:schemeClr val="bg1"/>
+                </a:solidFill>
+              </a:rPr>
+              <a:t> </a:t>
+            </a:r>
+            <a:r>
+              <a:rPr lang="ru-RU" sz="3200" dirty="0" smtClean="0">
+                <a:solidFill>
+                  <a:schemeClr val="bg1"/>
+                </a:solidFill>
+              </a:rPr>
+              <a:t>мера применённого метода.</a:t>
+            </a:r>
+            <a:endParaRPr lang="ru-RU" sz="3200" dirty="0">
+              <a:solidFill>
+                <a:schemeClr val="bg1"/>
+              </a:solidFill>
+            </a:endParaRPr>
+          </a:p>
+        </p:txBody>
+      </p:sp>
+    </p:spTree>
+    <p:extLst>
+      <p:ext uri="{BB962C8B-B14F-4D97-AF65-F5344CB8AC3E}">
+        <p14:creationId xmlns:p14="http://schemas.microsoft.com/office/powerpoint/2010/main" val="3848472413"/>
+      </p:ext>
+    </p:extLst>
+  </p:cSld>
+  <p:clrMapOvr>
+    <a:masterClrMapping/>
+  </p:clrMapOvr>
+  <p:timing>
+    <p:tnLst>
+      <p:par>
+        <p:cTn id="1" dur="indefinite" restart="never" nodeType="tmRoot"/>
+      </p:par>
+    </p:tnLst>
+  </p:timing>
+</p:sld>
+</file>
+
+<file path=ppt/slides/slide2.xml><?xml version="1.0" encoding="utf-8"?>
+<p:sld xmlns:a="http://schemas.openxmlformats.org/drawingml/2006/main" xmlns:r="http://schemas.openxmlformats.org/officeDocument/2006/relationships" xmlns:p="http://schemas.openxmlformats.org/presentationml/2006/main">
+  <p:cSld>
+    <p:spTree>
+      <p:nvGrpSpPr>
+        <p:cNvPr id="1" name=""/>
+        <p:cNvGrpSpPr/>
+        <p:nvPr/>
+      </p:nvGrpSpPr>
+      <p:grpSpPr>
+        <a:xfrm>
+          <a:off x="0" y="0"/>
+          <a:ext cx="0" cy="0"/>
+          <a:chOff x="0" y="0"/>
+          <a:chExt cx="0" cy="0"/>
+        </a:xfrm>
+      </p:grpSpPr>
+      <p:sp>
+        <p:nvSpPr>
+          <p:cNvPr id="7" name="Прямоугольник 6"/>
+          <p:cNvSpPr/>
+          <p:nvPr/>
+        </p:nvSpPr>
+        <p:spPr>
+          <a:xfrm>
+            <a:off x="0" y="0"/>
+            <a:ext cx="9144000" cy="1124744"/>
+          </a:xfrm>
+          <a:prstGeom prst="rect">
+            <a:avLst/>
+          </a:prstGeom>
+          <a:solidFill>
+            <a:srgbClr val="6D68CC"/>
+          </a:solidFill>
+          <a:ln>
+            <a:noFill/>
+          </a:ln>
+        </p:spPr>
+        <p:style>
+          <a:lnRef idx="2">
+            <a:schemeClr val="accent1">
+              <a:shade val="50000"/>
+            </a:schemeClr>
+          </a:lnRef>
+          <a:fillRef idx="1">
+            <a:schemeClr val="accent1"/>
+          </a:fillRef>
+          <a:effectRef idx="0">
+            <a:schemeClr val="accent1"/>
+          </a:effectRef>
+          <a:fontRef idx="minor">
+            <a:schemeClr val="lt1"/>
+          </a:fontRef>
+        </p:style>
+        <p:txBody>
+          <a:bodyPr rtlCol="0" anchor="ctr"/>
+          <a:lstStyle/>
+          <a:p>
+            <a:pPr algn="ctr"/>
+            <a:endParaRPr lang="ru-RU"/>
+          </a:p>
+        </p:txBody>
+      </p:sp>
+      <p:sp>
+        <p:nvSpPr>
+          <p:cNvPr id="2" name="TextBox 1"/>
+          <p:cNvSpPr txBox="1"/>
+          <p:nvPr/>
+        </p:nvSpPr>
+        <p:spPr>
+          <a:xfrm>
             <a:off x="683568" y="208429"/>
             <a:ext cx="8915012" cy="707886"/>
           </a:xfrm>
@@ -4211,6 +5632,230 @@
           </a:p>
         </p:txBody>
       </p:sp>
+      <p:sp>
+        <p:nvSpPr>
+          <p:cNvPr id="5" name="TextBox 4"/>
+          <p:cNvSpPr txBox="1"/>
+          <p:nvPr/>
+        </p:nvSpPr>
+        <p:spPr>
+          <a:xfrm>
+            <a:off x="323528" y="1484784"/>
+            <a:ext cx="8915012" cy="2062103"/>
+          </a:xfrm>
+          <a:prstGeom prst="rect">
+            <a:avLst/>
+          </a:prstGeom>
+          <a:noFill/>
+        </p:spPr>
+        <p:txBody>
+          <a:bodyPr wrap="square" rtlCol="0">
+            <a:spAutoFit/>
+          </a:bodyPr>
+          <a:lstStyle/>
+          <a:p>
+            <a:r>
+              <a:rPr lang="en-US" sz="3200" dirty="0" smtClean="0">
+                <a:solidFill>
+                  <a:schemeClr val="bg1"/>
+                </a:solidFill>
+              </a:rPr>
+              <a:t>&gt; </a:t>
+            </a:r>
+            <a:r>
+              <a:rPr lang="ru-RU" sz="3200" dirty="0" smtClean="0">
+                <a:solidFill>
+                  <a:schemeClr val="bg1"/>
+                </a:solidFill>
+              </a:rPr>
+              <a:t>Создание </a:t>
+            </a:r>
+            <a:r>
+              <a:rPr lang="ru-RU" sz="3200" dirty="0">
+                <a:solidFill>
+                  <a:schemeClr val="bg1"/>
+                </a:solidFill>
+              </a:rPr>
+              <a:t>чистого числового </a:t>
+            </a:r>
+            <a:r>
+              <a:rPr lang="ru-RU" sz="3200" dirty="0" smtClean="0">
+                <a:solidFill>
+                  <a:schemeClr val="bg1"/>
+                </a:solidFill>
+              </a:rPr>
+              <a:t>ряда</a:t>
+            </a:r>
+          </a:p>
+          <a:p>
+            <a:r>
+              <a:rPr lang="en-US" sz="3200" dirty="0" smtClean="0">
+                <a:solidFill>
+                  <a:schemeClr val="bg1"/>
+                </a:solidFill>
+              </a:rPr>
+              <a:t>&gt; </a:t>
+            </a:r>
+            <a:r>
+              <a:rPr lang="ru-RU" sz="3200" dirty="0" smtClean="0">
+                <a:solidFill>
+                  <a:schemeClr val="bg1"/>
+                </a:solidFill>
+              </a:rPr>
+              <a:t>Внесение шума</a:t>
+            </a:r>
+          </a:p>
+          <a:p>
+            <a:r>
+              <a:rPr lang="en-US" sz="3200" dirty="0" smtClean="0">
+                <a:solidFill>
+                  <a:schemeClr val="bg1"/>
+                </a:solidFill>
+              </a:rPr>
+              <a:t>&gt; </a:t>
+            </a:r>
+            <a:r>
+              <a:rPr lang="ru-RU" sz="3200" dirty="0" smtClean="0">
+                <a:solidFill>
+                  <a:schemeClr val="bg1"/>
+                </a:solidFill>
+              </a:rPr>
+              <a:t>Добавление выбросов</a:t>
+            </a:r>
+            <a:endParaRPr lang="ru-RU" sz="3200" dirty="0">
+              <a:solidFill>
+                <a:schemeClr val="bg1"/>
+              </a:solidFill>
+            </a:endParaRPr>
+          </a:p>
+          <a:p>
+            <a:r>
+              <a:rPr lang="en-US" sz="3200" dirty="0" smtClean="0">
+                <a:solidFill>
+                  <a:schemeClr val="bg1"/>
+                </a:solidFill>
+              </a:rPr>
+              <a:t>&gt; </a:t>
+            </a:r>
+            <a:r>
+              <a:rPr lang="ru-RU" sz="3200" dirty="0" smtClean="0">
+                <a:solidFill>
+                  <a:schemeClr val="bg1"/>
+                </a:solidFill>
+              </a:rPr>
+              <a:t>Обработка </a:t>
+            </a:r>
+            <a:r>
+              <a:rPr lang="ru-RU" sz="3200" dirty="0">
+                <a:solidFill>
+                  <a:schemeClr val="bg1"/>
+                </a:solidFill>
+              </a:rPr>
+              <a:t>данных</a:t>
+            </a:r>
+            <a:r>
+              <a:rPr lang="ru-RU" sz="3200" dirty="0" smtClean="0">
+                <a:solidFill>
+                  <a:schemeClr val="bg1"/>
+                </a:solidFill>
+              </a:rPr>
+              <a:t>.</a:t>
+            </a:r>
+            <a:endParaRPr lang="ru-RU" sz="3200" dirty="0">
+              <a:solidFill>
+                <a:schemeClr val="bg1"/>
+              </a:solidFill>
+            </a:endParaRPr>
+          </a:p>
+        </p:txBody>
+      </p:sp>
+      <p:pic>
+        <p:nvPicPr>
+          <p:cNvPr id="4" name="Рисунок 3"/>
+          <p:cNvPicPr>
+            <a:picLocks noChangeAspect="1"/>
+          </p:cNvPicPr>
+          <p:nvPr/>
+        </p:nvPicPr>
+        <p:blipFill rotWithShape="1">
+          <a:blip r:embed="rId3">
+            <a:extLst>
+              <a:ext uri="{28A0092B-C50C-407E-A947-70E740481C1C}">
+                <a14:useLocalDpi xmlns:a14="http://schemas.microsoft.com/office/drawing/2010/main" val="0"/>
+              </a:ext>
+            </a:extLst>
+          </a:blip>
+          <a:srcRect r="53935" b="47853"/>
+          <a:stretch/>
+        </p:blipFill>
+        <p:spPr>
+          <a:xfrm>
+            <a:off x="3853723" y="3819676"/>
+            <a:ext cx="4750725" cy="2561652"/>
+          </a:xfrm>
+          <a:prstGeom prst="rect">
+            <a:avLst/>
+          </a:prstGeom>
+          <a:ln w="38100" cap="sq">
+            <a:solidFill>
+              <a:srgbClr val="000000"/>
+            </a:solidFill>
+            <a:prstDash val="solid"/>
+            <a:miter lim="800000"/>
+          </a:ln>
+          <a:effectLst>
+            <a:outerShdw blurRad="50800" dist="38100" dir="2700000" algn="tl" rotWithShape="0">
+              <a:srgbClr val="000000">
+                <a:alpha val="43000"/>
+              </a:srgbClr>
+            </a:outerShdw>
+          </a:effectLst>
+        </p:spPr>
+      </p:pic>
+      <p:pic>
+        <p:nvPicPr>
+          <p:cNvPr id="8" name="Рисунок 7"/>
+          <p:cNvPicPr>
+            <a:picLocks noChangeAspect="1"/>
+          </p:cNvPicPr>
+          <p:nvPr/>
+        </p:nvPicPr>
+        <p:blipFill>
+          <a:blip r:embed="rId4">
+            <a:extLst>
+              <a:ext uri="{28A0092B-C50C-407E-A947-70E740481C1C}">
+                <a14:useLocalDpi xmlns:a14="http://schemas.microsoft.com/office/drawing/2010/main" val="0"/>
+              </a:ext>
+            </a:extLst>
+          </a:blip>
+          <a:stretch>
+            <a:fillRect/>
+          </a:stretch>
+        </p:blipFill>
+        <p:spPr>
+          <a:xfrm>
+            <a:off x="534365" y="3819675"/>
+            <a:ext cx="3024337" cy="2537905"/>
+          </a:xfrm>
+          <a:prstGeom prst="rect">
+            <a:avLst/>
+          </a:prstGeom>
+          <a:ln w="38100" cap="sq">
+            <a:solidFill>
+              <a:srgbClr val="000000"/>
+            </a:solidFill>
+            <a:prstDash val="solid"/>
+            <a:miter lim="800000"/>
+          </a:ln>
+          <a:effectLst>
+            <a:outerShdw blurRad="50800" dist="38100" dir="2700000" algn="tl" rotWithShape="0">
+              <a:srgbClr val="000000">
+                <a:alpha val="43000"/>
+              </a:srgbClr>
+            </a:outerShdw>
+          </a:effectLst>
+        </p:spPr>
+      </p:pic>
     </p:spTree>
     <p:extLst>
       <p:ext uri="{BB962C8B-B14F-4D97-AF65-F5344CB8AC3E}">
@@ -4302,7 +5947,7 @@
         </p:nvSpPr>
         <p:spPr>
           <a:xfrm>
-            <a:off x="611560" y="192571"/>
+            <a:off x="683568" y="208429"/>
             <a:ext cx="8915012" cy="707886"/>
           </a:xfrm>
           <a:prstGeom prst="rect">
@@ -4322,7 +5967,7 @@
                   <a:schemeClr val="bg1"/>
                 </a:solidFill>
               </a:rPr>
-              <a:t>СТАТИСТИЧЕСКИЙ МЕТОД</a:t>
+              <a:t>ГЕНЕРАТОР ДАННЫХ</a:t>
             </a:r>
             <a:endParaRPr lang="ru-RU" sz="4000" b="1" dirty="0">
               <a:solidFill>
@@ -4332,10 +5977,54 @@
           </a:p>
         </p:txBody>
       </p:sp>
+      <p:pic>
+        <p:nvPicPr>
+          <p:cNvPr id="6" name="Рисунок 5"/>
+          <p:cNvPicPr>
+            <a:picLocks noChangeAspect="1"/>
+          </p:cNvPicPr>
+          <p:nvPr/>
+        </p:nvPicPr>
+        <p:blipFill>
+          <a:blip r:embed="rId3">
+            <a:extLst>
+              <a:ext uri="{28A0092B-C50C-407E-A947-70E740481C1C}">
+                <a14:useLocalDpi xmlns:a14="http://schemas.microsoft.com/office/drawing/2010/main" val="0"/>
+              </a:ext>
+            </a:extLst>
+          </a:blip>
+          <a:stretch>
+            <a:fillRect/>
+          </a:stretch>
+        </p:blipFill>
+        <p:spPr>
+          <a:xfrm>
+            <a:off x="683568" y="1310982"/>
+            <a:ext cx="7776864" cy="5234339"/>
+          </a:xfrm>
+          <a:prstGeom prst="rect">
+            <a:avLst/>
+          </a:prstGeom>
+          <a:ln w="38100" cap="sq">
+            <a:solidFill>
+              <a:srgbClr val="000000"/>
+            </a:solidFill>
+            <a:prstDash val="solid"/>
+            <a:miter lim="800000"/>
+          </a:ln>
+          <a:effectLst>
+            <a:outerShdw blurRad="50800" dist="38100" dir="2700000" algn="tl" rotWithShape="0">
+              <a:srgbClr val="000000">
+                <a:alpha val="43000"/>
+              </a:srgbClr>
+            </a:outerShdw>
+          </a:effectLst>
+        </p:spPr>
+      </p:pic>
     </p:spTree>
     <p:extLst>
       <p:ext uri="{BB962C8B-B14F-4D97-AF65-F5344CB8AC3E}">
-        <p14:creationId xmlns:p14="http://schemas.microsoft.com/office/powerpoint/2010/main" val="1089899361"/>
+        <p14:creationId xmlns:p14="http://schemas.microsoft.com/office/powerpoint/2010/main" val="3355312563"/>
       </p:ext>
     </p:extLst>
   </p:cSld>
@@ -4423,7 +6112,7 @@
         </p:nvSpPr>
         <p:spPr>
           <a:xfrm>
-            <a:off x="625540" y="208429"/>
+            <a:off x="611560" y="192571"/>
             <a:ext cx="8915012" cy="707886"/>
           </a:xfrm>
           <a:prstGeom prst="rect">
@@ -4438,44 +6127,12 @@
           <a:lstStyle/>
           <a:p>
             <a:r>
-              <a:rPr lang="en-US" sz="4000" b="1" dirty="0" smtClean="0">
+              <a:rPr lang="ru-RU" sz="4000" b="1" dirty="0" smtClean="0">
                 <a:solidFill>
                   <a:schemeClr val="bg1"/>
                 </a:solidFill>
               </a:rPr>
-              <a:t>M</a:t>
-            </a:r>
-            <a:r>
-              <a:rPr lang="en-US" sz="4000" b="1" dirty="0" smtClean="0"/>
-              <a:t>ACHINE</a:t>
-            </a:r>
-            <a:r>
-              <a:rPr lang="en-US" sz="4000" b="1" dirty="0" smtClean="0">
-                <a:solidFill>
-                  <a:schemeClr val="bg1"/>
-                </a:solidFill>
-              </a:rPr>
-              <a:t> L</a:t>
-            </a:r>
-            <a:r>
-              <a:rPr lang="en-US" sz="4000" b="1" dirty="0" smtClean="0"/>
-              <a:t>EARNING</a:t>
-            </a:r>
-            <a:r>
-              <a:rPr lang="en-US" sz="4000" b="1" dirty="0" smtClean="0">
-                <a:solidFill>
-                  <a:schemeClr val="bg1"/>
-                </a:solidFill>
-              </a:rPr>
-              <a:t> </a:t>
-            </a:r>
-            <a:r>
-              <a:rPr lang="ru-RU" sz="4000" b="1" dirty="0" smtClean="0">
-                <a:solidFill>
-                  <a:schemeClr val="bg1"/>
-                </a:solidFill>
-              </a:rPr>
-              <a:t>МЕТОДЫ</a:t>
+              <a:t>СТАТИСТИЧЕСКИЙ МЕТОД</a:t>
             </a:r>
             <a:endParaRPr lang="ru-RU" sz="4000" b="1" dirty="0">
               <a:solidFill>
@@ -4485,10 +6142,98 @@
           </a:p>
         </p:txBody>
       </p:sp>
+      <p:pic>
+        <p:nvPicPr>
+          <p:cNvPr id="5" name="Рисунок 4"/>
+          <p:cNvPicPr>
+            <a:picLocks noChangeAspect="1"/>
+          </p:cNvPicPr>
+          <p:nvPr/>
+        </p:nvPicPr>
+        <p:blipFill>
+          <a:blip r:embed="rId3">
+            <a:extLst>
+              <a:ext uri="{28A0092B-C50C-407E-A947-70E740481C1C}">
+                <a14:useLocalDpi xmlns:a14="http://schemas.microsoft.com/office/drawing/2010/main" val="0"/>
+              </a:ext>
+            </a:extLst>
+          </a:blip>
+          <a:stretch>
+            <a:fillRect/>
+          </a:stretch>
+        </p:blipFill>
+        <p:spPr>
+          <a:xfrm>
+            <a:off x="611560" y="1844824"/>
+            <a:ext cx="7087847" cy="4762323"/>
+          </a:xfrm>
+          <a:prstGeom prst="rect">
+            <a:avLst/>
+          </a:prstGeom>
+          <a:ln w="38100" cap="sq">
+            <a:solidFill>
+              <a:srgbClr val="000000"/>
+            </a:solidFill>
+            <a:prstDash val="solid"/>
+            <a:miter lim="800000"/>
+          </a:ln>
+          <a:effectLst>
+            <a:outerShdw blurRad="50800" dist="38100" dir="2700000" algn="tl" rotWithShape="0">
+              <a:srgbClr val="000000">
+                <a:alpha val="43000"/>
+              </a:srgbClr>
+            </a:outerShdw>
+          </a:effectLst>
+        </p:spPr>
+      </p:pic>
+      <p:pic>
+        <p:nvPicPr>
+          <p:cNvPr id="3" name="Рисунок 2"/>
+          <p:cNvPicPr>
+            <a:picLocks noChangeAspect="1"/>
+          </p:cNvPicPr>
+          <p:nvPr/>
+        </p:nvPicPr>
+        <p:blipFill>
+          <a:blip r:embed="rId4">
+            <a:extLst>
+              <a:ext uri="{28A0092B-C50C-407E-A947-70E740481C1C}">
+                <a14:useLocalDpi xmlns:a14="http://schemas.microsoft.com/office/drawing/2010/main" val="0"/>
+              </a:ext>
+            </a:extLst>
+          </a:blip>
+          <a:stretch>
+            <a:fillRect/>
+          </a:stretch>
+        </p:blipFill>
+        <p:spPr>
+          <a:xfrm>
+            <a:off x="5508104" y="1458601"/>
+            <a:ext cx="3460539" cy="1224136"/>
+          </a:xfrm>
+          <a:prstGeom prst="rect">
+            <a:avLst/>
+          </a:prstGeom>
+          <a:ln w="38100" cap="sq">
+            <a:solidFill>
+              <a:srgbClr val="000000"/>
+            </a:solidFill>
+            <a:prstDash val="solid"/>
+            <a:miter lim="800000"/>
+          </a:ln>
+          <a:effectLst>
+            <a:outerShdw blurRad="50800" dist="38100" dir="2700000" algn="tl" rotWithShape="0">
+              <a:srgbClr val="000000">
+                <a:alpha val="43000"/>
+              </a:srgbClr>
+            </a:outerShdw>
+          </a:effectLst>
+        </p:spPr>
+      </p:pic>
     </p:spTree>
     <p:extLst>
       <p:ext uri="{BB962C8B-B14F-4D97-AF65-F5344CB8AC3E}">
-        <p14:creationId xmlns:p14="http://schemas.microsoft.com/office/powerpoint/2010/main" val="891153187"/>
+        <p14:creationId xmlns:p14="http://schemas.microsoft.com/office/powerpoint/2010/main" val="1089899361"/>
       </p:ext>
     </p:extLst>
   </p:cSld>
@@ -4576,7 +6321,7 @@
         </p:nvSpPr>
         <p:spPr>
           <a:xfrm>
-            <a:off x="611560" y="208429"/>
+            <a:off x="611560" y="192571"/>
             <a:ext cx="8915012" cy="707886"/>
           </a:xfrm>
           <a:prstGeom prst="rect">
@@ -4596,7 +6341,7 @@
                   <a:schemeClr val="bg1"/>
                 </a:solidFill>
               </a:rPr>
-              <a:t>ПОЛЬЗОВАТЕЛЬСКИЙ ИНТЕРФЕЙС</a:t>
+              <a:t>СТАТИСТИЧЕСКИЙ МЕТОД</a:t>
             </a:r>
             <a:endParaRPr lang="ru-RU" sz="4000" b="1" dirty="0">
               <a:solidFill>
@@ -4606,10 +6351,209 @@
           </a:p>
         </p:txBody>
       </p:sp>
+      <p:pic>
+        <p:nvPicPr>
+          <p:cNvPr id="6" name="Рисунок 5"/>
+          <p:cNvPicPr>
+            <a:picLocks noChangeAspect="1"/>
+          </p:cNvPicPr>
+          <p:nvPr/>
+        </p:nvPicPr>
+        <p:blipFill>
+          <a:blip r:embed="rId3">
+            <a:extLst>
+              <a:ext uri="{28A0092B-C50C-407E-A947-70E740481C1C}">
+                <a14:useLocalDpi xmlns:a14="http://schemas.microsoft.com/office/drawing/2010/main" val="0"/>
+              </a:ext>
+            </a:extLst>
+          </a:blip>
+          <a:stretch>
+            <a:fillRect/>
+          </a:stretch>
+        </p:blipFill>
+        <p:spPr>
+          <a:xfrm>
+            <a:off x="467544" y="1615073"/>
+            <a:ext cx="5797499" cy="4766255"/>
+          </a:xfrm>
+          <a:prstGeom prst="rect">
+            <a:avLst/>
+          </a:prstGeom>
+        </p:spPr>
+      </p:pic>
+      <p:sp>
+        <p:nvSpPr>
+          <p:cNvPr id="8" name="TextBox 7"/>
+          <p:cNvSpPr txBox="1"/>
+          <p:nvPr/>
+        </p:nvSpPr>
+        <p:spPr>
+          <a:xfrm>
+            <a:off x="6386179" y="3998200"/>
+            <a:ext cx="2650317" cy="584775"/>
+          </a:xfrm>
+          <a:prstGeom prst="rect">
+            <a:avLst/>
+          </a:prstGeom>
+          <a:solidFill>
+            <a:srgbClr val="6D68CC"/>
+          </a:solidFill>
+        </p:spPr>
+        <p:txBody>
+          <a:bodyPr wrap="square" rtlCol="0">
+            <a:spAutoFit/>
+          </a:bodyPr>
+          <a:lstStyle/>
+          <a:p>
+            <a:pPr algn="ctr"/>
+            <a:r>
+              <a:rPr lang="en-US" sz="3200" b="1" dirty="0" smtClean="0">
+                <a:solidFill>
+                  <a:schemeClr val="bg1"/>
+                </a:solidFill>
+              </a:rPr>
+              <a:t>F1 score: 1</a:t>
+            </a:r>
+            <a:endParaRPr lang="ru-RU" sz="3200" b="1" dirty="0">
+              <a:solidFill>
+                <a:schemeClr val="bg1"/>
+              </a:solidFill>
+            </a:endParaRPr>
+          </a:p>
+        </p:txBody>
+      </p:sp>
+      <mc:AlternateContent xmlns:mc="http://schemas.openxmlformats.org/markup-compatibility/2006">
+        <mc:Choice xmlns:a14="http://schemas.microsoft.com/office/drawing/2010/main" Requires="a14">
+          <p:sp>
+            <p:nvSpPr>
+              <p:cNvPr id="10" name="TextBox 9"/>
+              <p:cNvSpPr txBox="1"/>
+              <p:nvPr/>
+            </p:nvSpPr>
+            <p:spPr>
+              <a:xfrm>
+                <a:off x="6551714" y="3140968"/>
+                <a:ext cx="2111475" cy="593817"/>
+              </a:xfrm>
+              <a:prstGeom prst="rect">
+                <a:avLst/>
+              </a:prstGeom>
+              <a:noFill/>
+            </p:spPr>
+            <p:txBody>
+              <a:bodyPr wrap="none" rtlCol="0">
+                <a:spAutoFit/>
+              </a:bodyPr>
+              <a:lstStyle/>
+              <a:p>
+                <a:r>
+                  <a:rPr lang="en-US" sz="3200" b="1" dirty="0" smtClean="0">
+                    <a:solidFill>
+                      <a:schemeClr val="bg1"/>
+                    </a:solidFill>
+                  </a:rPr>
+                  <a:t>y </a:t>
+                </a:r>
+                <a14:m>
+                  <m:oMath xmlns:m="http://schemas.openxmlformats.org/officeDocument/2006/math">
+                    <m:r>
+                      <a:rPr lang="en-US" sz="3200" b="1" i="0" smtClean="0">
+                        <a:solidFill>
+                          <a:schemeClr val="bg1"/>
+                        </a:solidFill>
+                      </a:rPr>
+                      <m:t>=</m:t>
+                    </m:r>
+                    <m:rad>
+                      <m:radPr>
+                        <m:degHide m:val="on"/>
+                        <m:ctrlPr>
+                          <a:rPr lang="en-US" sz="3200" b="1" smtClean="0">
+                            <a:solidFill>
+                              <a:schemeClr val="bg1"/>
+                            </a:solidFill>
+                          </a:rPr>
+                        </m:ctrlPr>
+                      </m:radPr>
+                      <m:deg/>
+                      <m:e>
+                        <m:r>
+                          <a:rPr lang="en-US" sz="3200" b="1" i="0" smtClean="0">
+                            <a:solidFill>
+                              <a:schemeClr val="bg1"/>
+                            </a:solidFill>
+                            <a:latin typeface="Cambria Math"/>
+                          </a:rPr>
+                          <m:t>𝐱</m:t>
+                        </m:r>
+                      </m:e>
+                    </m:rad>
+                    <m:r>
+                      <a:rPr lang="en-US" sz="3200" b="1" i="0" smtClean="0">
+                        <a:solidFill>
+                          <a:schemeClr val="bg1"/>
+                        </a:solidFill>
+                      </a:rPr>
+                      <m:t>+</m:t>
+                    </m:r>
+                    <m:r>
+                      <a:rPr lang="en-US" sz="3200" b="1" i="0" smtClean="0">
+                        <a:solidFill>
+                          <a:schemeClr val="bg1"/>
+                        </a:solidFill>
+                      </a:rPr>
+                      <m:t>𝟏</m:t>
+                    </m:r>
+                  </m:oMath>
+                </a14:m>
+                <a:endParaRPr lang="ru-RU" sz="3200" b="1" dirty="0"/>
+              </a:p>
+            </p:txBody>
+          </p:sp>
+        </mc:Choice>
+        <mc:Fallback>
+          <p:sp>
+            <p:nvSpPr>
+              <p:cNvPr id="10" name="TextBox 9"/>
+              <p:cNvSpPr txBox="1">
+                <a:spLocks noRot="1" noChangeAspect="1" noMove="1" noResize="1" noEditPoints="1" noAdjustHandles="1" noChangeArrowheads="1" noChangeShapeType="1" noTextEdit="1"/>
+              </p:cNvSpPr>
+              <p:nvPr/>
+            </p:nvSpPr>
+            <p:spPr>
+              <a:xfrm>
+                <a:off x="6551714" y="3140968"/>
+                <a:ext cx="2111475" cy="593817"/>
+              </a:xfrm>
+              <a:prstGeom prst="rect">
+                <a:avLst/>
+              </a:prstGeom>
+              <a:blipFill rotWithShape="1">
+                <a:blip r:embed="rId4"/>
+                <a:stretch>
+                  <a:fillRect l="-7514" t="-11224" b="-32653"/>
+                </a:stretch>
+              </a:blipFill>
+            </p:spPr>
+            <p:txBody>
+              <a:bodyPr/>
+              <a:lstStyle/>
+              <a:p>
+                <a:r>
+                  <a:rPr lang="ru-RU">
+                    <a:noFill/>
+                  </a:rPr>
+                  <a:t> </a:t>
+                </a:r>
+              </a:p>
+            </p:txBody>
+          </p:sp>
+        </mc:Fallback>
+      </mc:AlternateContent>
     </p:spTree>
     <p:extLst>
       <p:ext uri="{BB962C8B-B14F-4D97-AF65-F5344CB8AC3E}">
-        <p14:creationId xmlns:p14="http://schemas.microsoft.com/office/powerpoint/2010/main" val="3090627775"/>
+        <p14:creationId xmlns:p14="http://schemas.microsoft.com/office/powerpoint/2010/main" val="4053631611"/>
       </p:ext>
     </p:extLst>
   </p:cSld>
@@ -4697,7 +6641,7 @@
         </p:nvSpPr>
         <p:spPr>
           <a:xfrm>
-            <a:off x="683568" y="235703"/>
+            <a:off x="611560" y="192571"/>
             <a:ext cx="8915012" cy="707886"/>
           </a:xfrm>
           <a:prstGeom prst="rect">
@@ -4717,7 +6661,7 @@
                   <a:schemeClr val="bg1"/>
                 </a:solidFill>
               </a:rPr>
-              <a:t>ВЫВОД</a:t>
+              <a:t>СТАТИСТИЧЕСКИЙ МЕТОД</a:t>
             </a:r>
             <a:endParaRPr lang="ru-RU" sz="4000" b="1" dirty="0">
               <a:solidFill>
@@ -4727,16 +6671,357 @@
           </a:p>
         </p:txBody>
       </p:sp>
-      <p:sp>
-        <p:nvSpPr>
-          <p:cNvPr id="4" name="TextBox 3"/>
+      <p:pic>
+        <p:nvPicPr>
+          <p:cNvPr id="6" name="Рисунок 5"/>
+          <p:cNvPicPr>
+            <a:picLocks noChangeAspect="1"/>
+          </p:cNvPicPr>
+          <p:nvPr/>
+        </p:nvPicPr>
+        <p:blipFill>
+          <a:blip r:embed="rId3">
+            <a:extLst>
+              <a:ext uri="{28A0092B-C50C-407E-A947-70E740481C1C}">
+                <a14:useLocalDpi xmlns:a14="http://schemas.microsoft.com/office/drawing/2010/main" val="0"/>
+              </a:ext>
+            </a:extLst>
+          </a:blip>
+          <a:stretch>
+            <a:fillRect/>
+          </a:stretch>
+        </p:blipFill>
+        <p:spPr>
+          <a:xfrm>
+            <a:off x="467544" y="1624524"/>
+            <a:ext cx="5797499" cy="4747353"/>
+          </a:xfrm>
+          <a:prstGeom prst="rect">
+            <a:avLst/>
+          </a:prstGeom>
+        </p:spPr>
+      </p:pic>
+      <p:sp>
+        <p:nvSpPr>
+          <p:cNvPr id="8" name="TextBox 7"/>
           <p:cNvSpPr txBox="1"/>
           <p:nvPr/>
         </p:nvSpPr>
         <p:spPr>
           <a:xfrm>
-            <a:off x="683568" y="2492896"/>
-            <a:ext cx="7992888" cy="707886"/>
+            <a:off x="6437263" y="3993743"/>
+            <a:ext cx="2578309" cy="584775"/>
+          </a:xfrm>
+          <a:prstGeom prst="rect">
+            <a:avLst/>
+          </a:prstGeom>
+          <a:solidFill>
+            <a:srgbClr val="6D68CC"/>
+          </a:solidFill>
+        </p:spPr>
+        <p:txBody>
+          <a:bodyPr wrap="square" rtlCol="0">
+            <a:spAutoFit/>
+          </a:bodyPr>
+          <a:lstStyle/>
+          <a:p>
+            <a:pPr algn="ctr"/>
+            <a:r>
+              <a:rPr lang="en-US" sz="3200" b="1" dirty="0" smtClean="0">
+                <a:solidFill>
+                  <a:schemeClr val="bg1"/>
+                </a:solidFill>
+              </a:rPr>
+              <a:t>F1 score: 0.66</a:t>
+            </a:r>
+            <a:endParaRPr lang="ru-RU" sz="3200" b="1" dirty="0">
+              <a:solidFill>
+                <a:schemeClr val="bg1"/>
+              </a:solidFill>
+            </a:endParaRPr>
+          </a:p>
+        </p:txBody>
+      </p:sp>
+      <mc:AlternateContent xmlns:mc="http://schemas.openxmlformats.org/markup-compatibility/2006">
+        <mc:Choice xmlns:a14="http://schemas.microsoft.com/office/drawing/2010/main" Requires="a14">
+          <p:sp>
+            <p:nvSpPr>
+              <p:cNvPr id="10" name="TextBox 9"/>
+              <p:cNvSpPr txBox="1"/>
+              <p:nvPr/>
+            </p:nvSpPr>
+            <p:spPr>
+              <a:xfrm>
+                <a:off x="6444208" y="3140968"/>
+                <a:ext cx="2564420" cy="584775"/>
+              </a:xfrm>
+              <a:prstGeom prst="rect">
+                <a:avLst/>
+              </a:prstGeom>
+              <a:noFill/>
+            </p:spPr>
+            <p:txBody>
+              <a:bodyPr wrap="none" rtlCol="0">
+                <a:spAutoFit/>
+              </a:bodyPr>
+              <a:lstStyle/>
+              <a:p>
+                <a:r>
+                  <a:rPr lang="en-US" sz="3200" b="1" dirty="0" smtClean="0">
+                    <a:solidFill>
+                      <a:schemeClr val="bg1"/>
+                    </a:solidFill>
+                  </a:rPr>
+                  <a:t>y </a:t>
+                </a:r>
+                <a14:m>
+                  <m:oMath xmlns:m="http://schemas.openxmlformats.org/officeDocument/2006/math">
+                    <m:r>
+                      <a:rPr lang="en-US" sz="3200" b="1" i="0" smtClean="0">
+                        <a:solidFill>
+                          <a:schemeClr val="bg1"/>
+                        </a:solidFill>
+                      </a:rPr>
+                      <m:t>=</m:t>
+                    </m:r>
+                    <m:func>
+                      <m:funcPr>
+                        <m:ctrlPr>
+                          <a:rPr lang="en-US" sz="3200" b="1" i="1" smtClean="0">
+                            <a:solidFill>
+                              <a:schemeClr val="bg1"/>
+                            </a:solidFill>
+                          </a:rPr>
+                        </m:ctrlPr>
+                      </m:funcPr>
+                      <m:fName>
+                        <m:r>
+                          <a:rPr lang="en-US" sz="3200" b="1" i="0" smtClean="0">
+                            <a:solidFill>
+                              <a:schemeClr val="bg1"/>
+                            </a:solidFill>
+                          </a:rPr>
+                          <m:t>𝐜𝐨𝐬</m:t>
+                        </m:r>
+                      </m:fName>
+                      <m:e>
+                        <m:r>
+                          <a:rPr lang="en-US" sz="3200" b="1" i="1" smtClean="0">
+                            <a:solidFill>
+                              <a:schemeClr val="bg1"/>
+                            </a:solidFill>
+                          </a:rPr>
+                          <m:t>𝒙</m:t>
+                        </m:r>
+                      </m:e>
+                    </m:func>
+                    <m:r>
+                      <a:rPr lang="en-US" sz="3200" b="1" i="0" smtClean="0">
+                        <a:solidFill>
+                          <a:schemeClr val="bg1"/>
+                        </a:solidFill>
+                      </a:rPr>
+                      <m:t>+</m:t>
+                    </m:r>
+                    <m:r>
+                      <a:rPr lang="en-US" sz="3200" b="1" i="0" smtClean="0">
+                        <a:solidFill>
+                          <a:schemeClr val="bg1"/>
+                        </a:solidFill>
+                      </a:rPr>
+                      <m:t>𝟏</m:t>
+                    </m:r>
+                  </m:oMath>
+                </a14:m>
+                <a:endParaRPr lang="ru-RU" sz="3200" b="1" dirty="0"/>
+              </a:p>
+            </p:txBody>
+          </p:sp>
+        </mc:Choice>
+        <mc:Fallback>
+          <p:sp>
+            <p:nvSpPr>
+              <p:cNvPr id="10" name="TextBox 9"/>
+              <p:cNvSpPr txBox="1">
+                <a:spLocks noRot="1" noChangeAspect="1" noMove="1" noResize="1" noEditPoints="1" noAdjustHandles="1" noChangeArrowheads="1" noChangeShapeType="1" noTextEdit="1"/>
+              </p:cNvSpPr>
+              <p:nvPr/>
+            </p:nvSpPr>
+            <p:spPr>
+              <a:xfrm>
+                <a:off x="6444208" y="3140968"/>
+                <a:ext cx="2564420" cy="584775"/>
+              </a:xfrm>
+              <a:prstGeom prst="rect">
+                <a:avLst/>
+              </a:prstGeom>
+              <a:blipFill rotWithShape="1">
+                <a:blip r:embed="rId4"/>
+                <a:stretch>
+                  <a:fillRect l="-5938" t="-12500" b="-34375"/>
+                </a:stretch>
+              </a:blipFill>
+            </p:spPr>
+            <p:txBody>
+              <a:bodyPr/>
+              <a:lstStyle/>
+              <a:p>
+                <a:r>
+                  <a:rPr lang="ru-RU">
+                    <a:noFill/>
+                  </a:rPr>
+                  <a:t> </a:t>
+                </a:r>
+              </a:p>
+            </p:txBody>
+          </p:sp>
+        </mc:Fallback>
+      </mc:AlternateContent>
+    </p:spTree>
+    <p:extLst>
+      <p:ext uri="{BB962C8B-B14F-4D97-AF65-F5344CB8AC3E}">
+        <p14:creationId xmlns:p14="http://schemas.microsoft.com/office/powerpoint/2010/main" val="4030312877"/>
+      </p:ext>
+    </p:extLst>
+  </p:cSld>
+  <p:clrMapOvr>
+    <a:masterClrMapping/>
+  </p:clrMapOvr>
+  <p:timing>
+    <p:tnLst>
+      <p:par>
+        <p:cTn id="1" dur="indefinite" restart="never" nodeType="tmRoot"/>
+      </p:par>
+    </p:tnLst>
+  </p:timing>
+</p:sld>
+</file>
+
+<file path=ppt/slides/slide7.xml><?xml version="1.0" encoding="utf-8"?>
+<p:sld xmlns:a="http://schemas.openxmlformats.org/drawingml/2006/main" xmlns:r="http://schemas.openxmlformats.org/officeDocument/2006/relationships" xmlns:p="http://schemas.openxmlformats.org/presentationml/2006/main">
+  <p:cSld>
+    <p:spTree>
+      <p:nvGrpSpPr>
+        <p:cNvPr id="1" name=""/>
+        <p:cNvGrpSpPr/>
+        <p:nvPr/>
+      </p:nvGrpSpPr>
+      <p:grpSpPr>
+        <a:xfrm>
+          <a:off x="0" y="0"/>
+          <a:ext cx="0" cy="0"/>
+          <a:chOff x="0" y="0"/>
+          <a:chExt cx="0" cy="0"/>
+        </a:xfrm>
+      </p:grpSpPr>
+      <p:sp>
+        <p:nvSpPr>
+          <p:cNvPr id="5" name="Прямоугольник 4"/>
+          <p:cNvSpPr/>
+          <p:nvPr/>
+        </p:nvSpPr>
+        <p:spPr>
+          <a:xfrm>
+            <a:off x="0" y="1124744"/>
+            <a:ext cx="9144000" cy="584775"/>
+          </a:xfrm>
+          <a:prstGeom prst="rect">
+            <a:avLst/>
+          </a:prstGeom>
+          <a:solidFill>
+            <a:srgbClr val="0D0C16"/>
+          </a:solidFill>
+          <a:ln>
+            <a:solidFill>
+              <a:schemeClr val="bg1"/>
+            </a:solidFill>
+          </a:ln>
+        </p:spPr>
+        <p:style>
+          <a:lnRef idx="2">
+            <a:schemeClr val="accent1">
+              <a:shade val="50000"/>
+            </a:schemeClr>
+          </a:lnRef>
+          <a:fillRef idx="1">
+            <a:schemeClr val="accent1"/>
+          </a:fillRef>
+          <a:effectRef idx="0">
+            <a:schemeClr val="accent1"/>
+          </a:effectRef>
+          <a:fontRef idx="minor">
+            <a:schemeClr val="lt1"/>
+          </a:fontRef>
+        </p:style>
+        <p:txBody>
+          <a:bodyPr rtlCol="0" anchor="ctr"/>
+          <a:lstStyle/>
+          <a:p>
+            <a:pPr algn="ctr"/>
+            <a:endParaRPr lang="ru-RU">
+              <a:solidFill>
+                <a:schemeClr val="bg1"/>
+              </a:solidFill>
+            </a:endParaRPr>
+          </a:p>
+        </p:txBody>
+      </p:sp>
+      <p:sp>
+        <p:nvSpPr>
+          <p:cNvPr id="7" name="Прямоугольник 6"/>
+          <p:cNvSpPr/>
+          <p:nvPr/>
+        </p:nvSpPr>
+        <p:spPr>
+          <a:xfrm>
+            <a:off x="0" y="0"/>
+            <a:ext cx="9144000" cy="1124744"/>
+          </a:xfrm>
+          <a:prstGeom prst="rect">
+            <a:avLst/>
+          </a:prstGeom>
+          <a:solidFill>
+            <a:srgbClr val="6D68CC"/>
+          </a:solidFill>
+          <a:ln>
+            <a:noFill/>
+          </a:ln>
+        </p:spPr>
+        <p:style>
+          <a:lnRef idx="2">
+            <a:schemeClr val="accent1">
+              <a:shade val="50000"/>
+            </a:schemeClr>
+          </a:lnRef>
+          <a:fillRef idx="1">
+            <a:schemeClr val="accent1"/>
+          </a:fillRef>
+          <a:effectRef idx="0">
+            <a:schemeClr val="accent1"/>
+          </a:effectRef>
+          <a:fontRef idx="minor">
+            <a:schemeClr val="lt1"/>
+          </a:fontRef>
+        </p:style>
+        <p:txBody>
+          <a:bodyPr rtlCol="0" anchor="ctr"/>
+          <a:lstStyle/>
+          <a:p>
+            <a:pPr algn="ctr"/>
+            <a:endParaRPr lang="ru-RU"/>
+          </a:p>
+        </p:txBody>
+      </p:sp>
+      <p:sp>
+        <p:nvSpPr>
+          <p:cNvPr id="2" name="TextBox 1"/>
+          <p:cNvSpPr txBox="1"/>
+          <p:nvPr/>
+        </p:nvSpPr>
+        <p:spPr>
+          <a:xfrm>
+            <a:off x="625540" y="208429"/>
+            <a:ext cx="8915012" cy="707886"/>
           </a:xfrm>
           <a:prstGeom prst="rect">
             <a:avLst/>
@@ -4750,20 +7035,44 @@
           <a:lstStyle/>
           <a:p>
             <a:r>
+              <a:rPr lang="en-US" sz="4000" b="1" dirty="0" smtClean="0">
+                <a:solidFill>
+                  <a:schemeClr val="bg1"/>
+                </a:solidFill>
+              </a:rPr>
+              <a:t>M</a:t>
+            </a:r>
+            <a:r>
+              <a:rPr lang="en-US" sz="4000" b="1" dirty="0" smtClean="0"/>
+              <a:t>ACHINE</a:t>
+            </a:r>
+            <a:r>
+              <a:rPr lang="en-US" sz="4000" b="1" dirty="0" smtClean="0">
+                <a:solidFill>
+                  <a:schemeClr val="bg1"/>
+                </a:solidFill>
+              </a:rPr>
+              <a:t> L</a:t>
+            </a:r>
+            <a:r>
+              <a:rPr lang="en-US" sz="4000" b="1" dirty="0" smtClean="0"/>
+              <a:t>EARNING</a:t>
+            </a:r>
+            <a:r>
+              <a:rPr lang="en-US" sz="4000" b="1" dirty="0" smtClean="0">
+                <a:solidFill>
+                  <a:schemeClr val="bg1"/>
+                </a:solidFill>
+              </a:rPr>
+              <a:t> </a:t>
+            </a:r>
+            <a:r>
               <a:rPr lang="ru-RU" sz="4000" b="1" dirty="0" smtClean="0">
                 <a:solidFill>
                   <a:schemeClr val="bg1"/>
                 </a:solidFill>
               </a:rPr>
-              <a:t>Мы очень крутые </a:t>
-            </a:r>
-            <a:r>
-              <a:rPr lang="ru-RU" sz="4000" b="1" dirty="0" err="1" smtClean="0">
-                <a:solidFill>
-                  <a:schemeClr val="bg1"/>
-                </a:solidFill>
-              </a:rPr>
-              <a:t>йоу</a:t>
+              <a:t>МЕТОДЫ</a:t>
             </a:r>
             <a:endParaRPr lang="ru-RU" sz="4000" b="1" dirty="0">
               <a:solidFill>
@@ -4773,10 +7082,905 @@
           </a:p>
         </p:txBody>
       </p:sp>
+      <p:sp>
+        <p:nvSpPr>
+          <p:cNvPr id="3" name="TextBox 2"/>
+          <p:cNvSpPr txBox="1"/>
+          <p:nvPr/>
+        </p:nvSpPr>
+        <p:spPr>
+          <a:xfrm>
+            <a:off x="625540" y="1124744"/>
+            <a:ext cx="3392404" cy="584775"/>
+          </a:xfrm>
+          <a:prstGeom prst="rect">
+            <a:avLst/>
+          </a:prstGeom>
+          <a:noFill/>
+        </p:spPr>
+        <p:txBody>
+          <a:bodyPr wrap="none" rtlCol="0">
+            <a:spAutoFit/>
+          </a:bodyPr>
+          <a:lstStyle/>
+          <a:p>
+            <a:r>
+              <a:rPr lang="en-US" sz="3200" b="1" dirty="0" smtClean="0">
+                <a:solidFill>
+                  <a:schemeClr val="bg1"/>
+                </a:solidFill>
+              </a:rPr>
+              <a:t>ISOLATION</a:t>
+            </a:r>
+            <a:r>
+              <a:rPr lang="en-US" sz="3200" b="1" dirty="0" smtClean="0">
+                <a:solidFill>
+                  <a:srgbClr val="6D68CC"/>
+                </a:solidFill>
+              </a:rPr>
+              <a:t> </a:t>
+            </a:r>
+            <a:r>
+              <a:rPr lang="en-US" sz="3200" b="1" dirty="0" smtClean="0">
+                <a:solidFill>
+                  <a:schemeClr val="bg1"/>
+                </a:solidFill>
+              </a:rPr>
+              <a:t>FOREST</a:t>
+            </a:r>
+            <a:endParaRPr lang="ru-RU" sz="3200" b="1" dirty="0">
+              <a:solidFill>
+                <a:schemeClr val="bg1"/>
+              </a:solidFill>
+            </a:endParaRPr>
+          </a:p>
+        </p:txBody>
+      </p:sp>
+      <p:pic>
+        <p:nvPicPr>
+          <p:cNvPr id="4" name="Рисунок 3"/>
+          <p:cNvPicPr>
+            <a:picLocks noChangeAspect="1"/>
+          </p:cNvPicPr>
+          <p:nvPr/>
+        </p:nvPicPr>
+        <p:blipFill>
+          <a:blip r:embed="rId3" cstate="print">
+            <a:extLst>
+              <a:ext uri="{28A0092B-C50C-407E-A947-70E740481C1C}">
+                <a14:useLocalDpi xmlns:a14="http://schemas.microsoft.com/office/drawing/2010/main" val="0"/>
+              </a:ext>
+            </a:extLst>
+          </a:blip>
+          <a:stretch>
+            <a:fillRect/>
+          </a:stretch>
+        </p:blipFill>
+        <p:spPr>
+          <a:xfrm>
+            <a:off x="364154" y="2276872"/>
+            <a:ext cx="8456318" cy="3816424"/>
+          </a:xfrm>
+          <a:prstGeom prst="rect">
+            <a:avLst/>
+          </a:prstGeom>
+        </p:spPr>
+      </p:pic>
     </p:spTree>
     <p:extLst>
       <p:ext uri="{BB962C8B-B14F-4D97-AF65-F5344CB8AC3E}">
-        <p14:creationId xmlns:p14="http://schemas.microsoft.com/office/powerpoint/2010/main" val="3166774384"/>
+        <p14:creationId xmlns:p14="http://schemas.microsoft.com/office/powerpoint/2010/main" val="891153187"/>
+      </p:ext>
+    </p:extLst>
+  </p:cSld>
+  <p:clrMapOvr>
+    <a:masterClrMapping/>
+  </p:clrMapOvr>
+  <p:timing>
+    <p:tnLst>
+      <p:par>
+        <p:cTn id="1" dur="indefinite" restart="never" nodeType="tmRoot"/>
+      </p:par>
+    </p:tnLst>
+  </p:timing>
+</p:sld>
+</file>
+
+<file path=ppt/slides/slide8.xml><?xml version="1.0" encoding="utf-8"?>
+<p:sld xmlns:a="http://schemas.openxmlformats.org/drawingml/2006/main" xmlns:r="http://schemas.openxmlformats.org/officeDocument/2006/relationships" xmlns:p="http://schemas.openxmlformats.org/presentationml/2006/main">
+  <p:cSld>
+    <p:spTree>
+      <p:nvGrpSpPr>
+        <p:cNvPr id="1" name=""/>
+        <p:cNvGrpSpPr/>
+        <p:nvPr/>
+      </p:nvGrpSpPr>
+      <p:grpSpPr>
+        <a:xfrm>
+          <a:off x="0" y="0"/>
+          <a:ext cx="0" cy="0"/>
+          <a:chOff x="0" y="0"/>
+          <a:chExt cx="0" cy="0"/>
+        </a:xfrm>
+      </p:grpSpPr>
+      <p:sp>
+        <p:nvSpPr>
+          <p:cNvPr id="5" name="Прямоугольник 4"/>
+          <p:cNvSpPr/>
+          <p:nvPr/>
+        </p:nvSpPr>
+        <p:spPr>
+          <a:xfrm>
+            <a:off x="0" y="1124744"/>
+            <a:ext cx="9144000" cy="584775"/>
+          </a:xfrm>
+          <a:prstGeom prst="rect">
+            <a:avLst/>
+          </a:prstGeom>
+          <a:solidFill>
+            <a:srgbClr val="0D0C16"/>
+          </a:solidFill>
+          <a:ln>
+            <a:solidFill>
+              <a:schemeClr val="bg1"/>
+            </a:solidFill>
+          </a:ln>
+        </p:spPr>
+        <p:style>
+          <a:lnRef idx="2">
+            <a:schemeClr val="accent1">
+              <a:shade val="50000"/>
+            </a:schemeClr>
+          </a:lnRef>
+          <a:fillRef idx="1">
+            <a:schemeClr val="accent1"/>
+          </a:fillRef>
+          <a:effectRef idx="0">
+            <a:schemeClr val="accent1"/>
+          </a:effectRef>
+          <a:fontRef idx="minor">
+            <a:schemeClr val="lt1"/>
+          </a:fontRef>
+        </p:style>
+        <p:txBody>
+          <a:bodyPr rtlCol="0" anchor="ctr"/>
+          <a:lstStyle/>
+          <a:p>
+            <a:pPr algn="ctr"/>
+            <a:endParaRPr lang="ru-RU">
+              <a:solidFill>
+                <a:schemeClr val="bg1"/>
+              </a:solidFill>
+            </a:endParaRPr>
+          </a:p>
+        </p:txBody>
+      </p:sp>
+      <p:sp>
+        <p:nvSpPr>
+          <p:cNvPr id="7" name="Прямоугольник 6"/>
+          <p:cNvSpPr/>
+          <p:nvPr/>
+        </p:nvSpPr>
+        <p:spPr>
+          <a:xfrm>
+            <a:off x="0" y="0"/>
+            <a:ext cx="9144000" cy="1124744"/>
+          </a:xfrm>
+          <a:prstGeom prst="rect">
+            <a:avLst/>
+          </a:prstGeom>
+          <a:solidFill>
+            <a:srgbClr val="6D68CC"/>
+          </a:solidFill>
+          <a:ln>
+            <a:noFill/>
+          </a:ln>
+        </p:spPr>
+        <p:style>
+          <a:lnRef idx="2">
+            <a:schemeClr val="accent1">
+              <a:shade val="50000"/>
+            </a:schemeClr>
+          </a:lnRef>
+          <a:fillRef idx="1">
+            <a:schemeClr val="accent1"/>
+          </a:fillRef>
+          <a:effectRef idx="0">
+            <a:schemeClr val="accent1"/>
+          </a:effectRef>
+          <a:fontRef idx="minor">
+            <a:schemeClr val="lt1"/>
+          </a:fontRef>
+        </p:style>
+        <p:txBody>
+          <a:bodyPr rtlCol="0" anchor="ctr"/>
+          <a:lstStyle/>
+          <a:p>
+            <a:pPr algn="ctr"/>
+            <a:endParaRPr lang="ru-RU"/>
+          </a:p>
+        </p:txBody>
+      </p:sp>
+      <p:sp>
+        <p:nvSpPr>
+          <p:cNvPr id="2" name="TextBox 1"/>
+          <p:cNvSpPr txBox="1"/>
+          <p:nvPr/>
+        </p:nvSpPr>
+        <p:spPr>
+          <a:xfrm>
+            <a:off x="625540" y="208429"/>
+            <a:ext cx="8915012" cy="707886"/>
+          </a:xfrm>
+          <a:prstGeom prst="rect">
+            <a:avLst/>
+          </a:prstGeom>
+          <a:noFill/>
+        </p:spPr>
+        <p:txBody>
+          <a:bodyPr wrap="square" rtlCol="0">
+            <a:spAutoFit/>
+          </a:bodyPr>
+          <a:lstStyle/>
+          <a:p>
+            <a:r>
+              <a:rPr lang="en-US" sz="4000" b="1" dirty="0" smtClean="0">
+                <a:solidFill>
+                  <a:schemeClr val="bg1"/>
+                </a:solidFill>
+              </a:rPr>
+              <a:t>M</a:t>
+            </a:r>
+            <a:r>
+              <a:rPr lang="en-US" sz="4000" b="1" dirty="0" smtClean="0"/>
+              <a:t>ACHINE</a:t>
+            </a:r>
+            <a:r>
+              <a:rPr lang="en-US" sz="4000" b="1" dirty="0" smtClean="0">
+                <a:solidFill>
+                  <a:schemeClr val="bg1"/>
+                </a:solidFill>
+              </a:rPr>
+              <a:t> L</a:t>
+            </a:r>
+            <a:r>
+              <a:rPr lang="en-US" sz="4000" b="1" dirty="0" smtClean="0"/>
+              <a:t>EARNING</a:t>
+            </a:r>
+            <a:r>
+              <a:rPr lang="en-US" sz="4000" b="1" dirty="0" smtClean="0">
+                <a:solidFill>
+                  <a:schemeClr val="bg1"/>
+                </a:solidFill>
+              </a:rPr>
+              <a:t> </a:t>
+            </a:r>
+            <a:r>
+              <a:rPr lang="ru-RU" sz="4000" b="1" dirty="0" smtClean="0">
+                <a:solidFill>
+                  <a:schemeClr val="bg1"/>
+                </a:solidFill>
+              </a:rPr>
+              <a:t>МЕТОДЫ</a:t>
+            </a:r>
+            <a:endParaRPr lang="ru-RU" sz="4000" b="1" dirty="0">
+              <a:solidFill>
+                <a:schemeClr val="bg1"/>
+              </a:solidFill>
+            </a:endParaRPr>
+          </a:p>
+        </p:txBody>
+      </p:sp>
+      <p:sp>
+        <p:nvSpPr>
+          <p:cNvPr id="3" name="TextBox 2"/>
+          <p:cNvSpPr txBox="1"/>
+          <p:nvPr/>
+        </p:nvSpPr>
+        <p:spPr>
+          <a:xfrm>
+            <a:off x="625540" y="1124744"/>
+            <a:ext cx="3392404" cy="584775"/>
+          </a:xfrm>
+          <a:prstGeom prst="rect">
+            <a:avLst/>
+          </a:prstGeom>
+          <a:noFill/>
+        </p:spPr>
+        <p:txBody>
+          <a:bodyPr wrap="none" rtlCol="0">
+            <a:spAutoFit/>
+          </a:bodyPr>
+          <a:lstStyle/>
+          <a:p>
+            <a:r>
+              <a:rPr lang="en-US" sz="3200" b="1" dirty="0" smtClean="0">
+                <a:solidFill>
+                  <a:schemeClr val="bg1"/>
+                </a:solidFill>
+              </a:rPr>
+              <a:t>ISOLATION</a:t>
+            </a:r>
+            <a:r>
+              <a:rPr lang="en-US" sz="3200" b="1" dirty="0" smtClean="0">
+                <a:solidFill>
+                  <a:srgbClr val="6D68CC"/>
+                </a:solidFill>
+              </a:rPr>
+              <a:t> </a:t>
+            </a:r>
+            <a:r>
+              <a:rPr lang="en-US" sz="3200" b="1" dirty="0" smtClean="0">
+                <a:solidFill>
+                  <a:schemeClr val="bg1"/>
+                </a:solidFill>
+              </a:rPr>
+              <a:t>FOREST</a:t>
+            </a:r>
+            <a:endParaRPr lang="ru-RU" sz="3200" b="1" dirty="0">
+              <a:solidFill>
+                <a:schemeClr val="bg1"/>
+              </a:solidFill>
+            </a:endParaRPr>
+          </a:p>
+        </p:txBody>
+      </p:sp>
+      <p:pic>
+        <p:nvPicPr>
+          <p:cNvPr id="8" name="Рисунок 7"/>
+          <p:cNvPicPr>
+            <a:picLocks noChangeAspect="1"/>
+          </p:cNvPicPr>
+          <p:nvPr/>
+        </p:nvPicPr>
+        <p:blipFill>
+          <a:blip r:embed="rId3">
+            <a:extLst>
+              <a:ext uri="{28A0092B-C50C-407E-A947-70E740481C1C}">
+                <a14:useLocalDpi xmlns:a14="http://schemas.microsoft.com/office/drawing/2010/main" val="0"/>
+              </a:ext>
+            </a:extLst>
+          </a:blip>
+          <a:stretch>
+            <a:fillRect/>
+          </a:stretch>
+        </p:blipFill>
+        <p:spPr>
+          <a:xfrm>
+            <a:off x="467544" y="1945580"/>
+            <a:ext cx="5797499" cy="4700207"/>
+          </a:xfrm>
+          <a:prstGeom prst="rect">
+            <a:avLst/>
+          </a:prstGeom>
+        </p:spPr>
+      </p:pic>
+      <p:sp>
+        <p:nvSpPr>
+          <p:cNvPr id="9" name="TextBox 8"/>
+          <p:cNvSpPr txBox="1"/>
+          <p:nvPr/>
+        </p:nvSpPr>
+        <p:spPr>
+          <a:xfrm>
+            <a:off x="6437263" y="4291226"/>
+            <a:ext cx="2578309" cy="584775"/>
+          </a:xfrm>
+          <a:prstGeom prst="rect">
+            <a:avLst/>
+          </a:prstGeom>
+          <a:solidFill>
+            <a:srgbClr val="6D68CC"/>
+          </a:solidFill>
+        </p:spPr>
+        <p:txBody>
+          <a:bodyPr wrap="square" rtlCol="0">
+            <a:spAutoFit/>
+          </a:bodyPr>
+          <a:lstStyle/>
+          <a:p>
+            <a:pPr algn="ctr"/>
+            <a:r>
+              <a:rPr lang="en-US" sz="3200" b="1" dirty="0" smtClean="0">
+                <a:solidFill>
+                  <a:schemeClr val="bg1"/>
+                </a:solidFill>
+              </a:rPr>
+              <a:t>F1 score: 0.77</a:t>
+            </a:r>
+            <a:endParaRPr lang="ru-RU" sz="3200" b="1" dirty="0">
+              <a:solidFill>
+                <a:schemeClr val="bg1"/>
+              </a:solidFill>
+            </a:endParaRPr>
+          </a:p>
+        </p:txBody>
+      </p:sp>
+      <mc:AlternateContent xmlns:mc="http://schemas.openxmlformats.org/markup-compatibility/2006">
+        <mc:Choice xmlns:a14="http://schemas.microsoft.com/office/drawing/2010/main" Requires="a14">
+          <p:sp>
+            <p:nvSpPr>
+              <p:cNvPr id="10" name="TextBox 9"/>
+              <p:cNvSpPr txBox="1"/>
+              <p:nvPr/>
+            </p:nvSpPr>
+            <p:spPr>
+              <a:xfrm>
+                <a:off x="6444208" y="3438451"/>
+                <a:ext cx="2564420" cy="584775"/>
+              </a:xfrm>
+              <a:prstGeom prst="rect">
+                <a:avLst/>
+              </a:prstGeom>
+              <a:noFill/>
+            </p:spPr>
+            <p:txBody>
+              <a:bodyPr wrap="none" rtlCol="0">
+                <a:spAutoFit/>
+              </a:bodyPr>
+              <a:lstStyle/>
+              <a:p>
+                <a:r>
+                  <a:rPr lang="en-US" sz="3200" b="1" dirty="0" smtClean="0">
+                    <a:solidFill>
+                      <a:schemeClr val="bg1"/>
+                    </a:solidFill>
+                  </a:rPr>
+                  <a:t>y </a:t>
+                </a:r>
+                <a14:m>
+                  <m:oMath xmlns:m="http://schemas.openxmlformats.org/officeDocument/2006/math">
+                    <m:r>
+                      <a:rPr lang="en-US" sz="3200" b="1" i="0" smtClean="0">
+                        <a:solidFill>
+                          <a:schemeClr val="bg1"/>
+                        </a:solidFill>
+                      </a:rPr>
+                      <m:t>=</m:t>
+                    </m:r>
+                    <m:func>
+                      <m:funcPr>
+                        <m:ctrlPr>
+                          <a:rPr lang="en-US" sz="3200" b="1" i="1" smtClean="0">
+                            <a:solidFill>
+                              <a:schemeClr val="bg1"/>
+                            </a:solidFill>
+                          </a:rPr>
+                        </m:ctrlPr>
+                      </m:funcPr>
+                      <m:fName>
+                        <m:r>
+                          <a:rPr lang="en-US" sz="3200" b="1" i="0" smtClean="0">
+                            <a:solidFill>
+                              <a:schemeClr val="bg1"/>
+                            </a:solidFill>
+                          </a:rPr>
+                          <m:t>𝐜𝐨𝐬</m:t>
+                        </m:r>
+                      </m:fName>
+                      <m:e>
+                        <m:r>
+                          <a:rPr lang="en-US" sz="3200" b="1" i="1" smtClean="0">
+                            <a:solidFill>
+                              <a:schemeClr val="bg1"/>
+                            </a:solidFill>
+                          </a:rPr>
+                          <m:t>𝒙</m:t>
+                        </m:r>
+                      </m:e>
+                    </m:func>
+                    <m:r>
+                      <a:rPr lang="en-US" sz="3200" b="1" i="0" smtClean="0">
+                        <a:solidFill>
+                          <a:schemeClr val="bg1"/>
+                        </a:solidFill>
+                      </a:rPr>
+                      <m:t>+</m:t>
+                    </m:r>
+                    <m:r>
+                      <a:rPr lang="en-US" sz="3200" b="1" i="0" smtClean="0">
+                        <a:solidFill>
+                          <a:schemeClr val="bg1"/>
+                        </a:solidFill>
+                      </a:rPr>
+                      <m:t>𝟏</m:t>
+                    </m:r>
+                  </m:oMath>
+                </a14:m>
+                <a:endParaRPr lang="ru-RU" sz="3200" b="1" dirty="0"/>
+              </a:p>
+            </p:txBody>
+          </p:sp>
+        </mc:Choice>
+        <mc:Fallback>
+          <p:sp>
+            <p:nvSpPr>
+              <p:cNvPr id="10" name="TextBox 9"/>
+              <p:cNvSpPr txBox="1">
+                <a:spLocks noRot="1" noChangeAspect="1" noMove="1" noResize="1" noEditPoints="1" noAdjustHandles="1" noChangeArrowheads="1" noChangeShapeType="1" noTextEdit="1"/>
+              </p:cNvSpPr>
+              <p:nvPr/>
+            </p:nvSpPr>
+            <p:spPr>
+              <a:xfrm>
+                <a:off x="6444208" y="3438451"/>
+                <a:ext cx="2564420" cy="584775"/>
+              </a:xfrm>
+              <a:prstGeom prst="rect">
+                <a:avLst/>
+              </a:prstGeom>
+              <a:blipFill rotWithShape="1">
+                <a:blip r:embed="rId4"/>
+                <a:stretch>
+                  <a:fillRect l="-5938" t="-12500" b="-34375"/>
+                </a:stretch>
+              </a:blipFill>
+            </p:spPr>
+            <p:txBody>
+              <a:bodyPr/>
+              <a:lstStyle/>
+              <a:p>
+                <a:r>
+                  <a:rPr lang="ru-RU">
+                    <a:noFill/>
+                  </a:rPr>
+                  <a:t> </a:t>
+                </a:r>
+              </a:p>
+            </p:txBody>
+          </p:sp>
+        </mc:Fallback>
+      </mc:AlternateContent>
+    </p:spTree>
+    <p:extLst>
+      <p:ext uri="{BB962C8B-B14F-4D97-AF65-F5344CB8AC3E}">
+        <p14:creationId xmlns:p14="http://schemas.microsoft.com/office/powerpoint/2010/main" val="488022419"/>
+      </p:ext>
+    </p:extLst>
+  </p:cSld>
+  <p:clrMapOvr>
+    <a:masterClrMapping/>
+  </p:clrMapOvr>
+  <p:timing>
+    <p:tnLst>
+      <p:par>
+        <p:cTn id="1" dur="indefinite" restart="never" nodeType="tmRoot"/>
+      </p:par>
+    </p:tnLst>
+  </p:timing>
+</p:sld>
+</file>
+
+<file path=ppt/slides/slide9.xml><?xml version="1.0" encoding="utf-8"?>
+<p:sld xmlns:a="http://schemas.openxmlformats.org/drawingml/2006/main" xmlns:r="http://schemas.openxmlformats.org/officeDocument/2006/relationships" xmlns:p="http://schemas.openxmlformats.org/presentationml/2006/main">
+  <p:cSld>
+    <p:spTree>
+      <p:nvGrpSpPr>
+        <p:cNvPr id="1" name=""/>
+        <p:cNvGrpSpPr/>
+        <p:nvPr/>
+      </p:nvGrpSpPr>
+      <p:grpSpPr>
+        <a:xfrm>
+          <a:off x="0" y="0"/>
+          <a:ext cx="0" cy="0"/>
+          <a:chOff x="0" y="0"/>
+          <a:chExt cx="0" cy="0"/>
+        </a:xfrm>
+      </p:grpSpPr>
+      <p:pic>
+        <p:nvPicPr>
+          <p:cNvPr id="9" name="Рисунок 8"/>
+          <p:cNvPicPr>
+            <a:picLocks noChangeAspect="1"/>
+          </p:cNvPicPr>
+          <p:nvPr/>
+        </p:nvPicPr>
+        <p:blipFill rotWithShape="1">
+          <a:blip r:embed="rId3">
+            <a:extLst>
+              <a:ext uri="{28A0092B-C50C-407E-A947-70E740481C1C}">
+                <a14:useLocalDpi xmlns:a14="http://schemas.microsoft.com/office/drawing/2010/main" val="0"/>
+              </a:ext>
+            </a:extLst>
+          </a:blip>
+          <a:srcRect t="7846"/>
+          <a:stretch/>
+        </p:blipFill>
+        <p:spPr>
+          <a:xfrm>
+            <a:off x="6084168" y="3669594"/>
+            <a:ext cx="2929382" cy="767518"/>
+          </a:xfrm>
+          <a:prstGeom prst="rect">
+            <a:avLst/>
+          </a:prstGeom>
+        </p:spPr>
+      </p:pic>
+      <p:sp>
+        <p:nvSpPr>
+          <p:cNvPr id="5" name="Прямоугольник 4"/>
+          <p:cNvSpPr/>
+          <p:nvPr/>
+        </p:nvSpPr>
+        <p:spPr>
+          <a:xfrm>
+            <a:off x="0" y="1124744"/>
+            <a:ext cx="9144000" cy="584775"/>
+          </a:xfrm>
+          <a:prstGeom prst="rect">
+            <a:avLst/>
+          </a:prstGeom>
+          <a:solidFill>
+            <a:srgbClr val="0D0C16"/>
+          </a:solidFill>
+          <a:ln>
+            <a:solidFill>
+              <a:schemeClr val="bg1"/>
+            </a:solidFill>
+          </a:ln>
+        </p:spPr>
+        <p:style>
+          <a:lnRef idx="2">
+            <a:schemeClr val="accent1">
+              <a:shade val="50000"/>
+            </a:schemeClr>
+          </a:lnRef>
+          <a:fillRef idx="1">
+            <a:schemeClr val="accent1"/>
+          </a:fillRef>
+          <a:effectRef idx="0">
+            <a:schemeClr val="accent1"/>
+          </a:effectRef>
+          <a:fontRef idx="minor">
+            <a:schemeClr val="lt1"/>
+          </a:fontRef>
+        </p:style>
+        <p:txBody>
+          <a:bodyPr rtlCol="0" anchor="ctr"/>
+          <a:lstStyle/>
+          <a:p>
+            <a:pPr algn="ctr"/>
+            <a:endParaRPr lang="ru-RU">
+              <a:solidFill>
+                <a:schemeClr val="bg1"/>
+              </a:solidFill>
+            </a:endParaRPr>
+          </a:p>
+        </p:txBody>
+      </p:sp>
+      <p:sp>
+        <p:nvSpPr>
+          <p:cNvPr id="7" name="Прямоугольник 6"/>
+          <p:cNvSpPr/>
+          <p:nvPr/>
+        </p:nvSpPr>
+        <p:spPr>
+          <a:xfrm>
+            <a:off x="0" y="0"/>
+            <a:ext cx="9144000" cy="1124744"/>
+          </a:xfrm>
+          <a:prstGeom prst="rect">
+            <a:avLst/>
+          </a:prstGeom>
+          <a:solidFill>
+            <a:srgbClr val="6D68CC"/>
+          </a:solidFill>
+          <a:ln>
+            <a:noFill/>
+          </a:ln>
+        </p:spPr>
+        <p:style>
+          <a:lnRef idx="2">
+            <a:schemeClr val="accent1">
+              <a:shade val="50000"/>
+            </a:schemeClr>
+          </a:lnRef>
+          <a:fillRef idx="1">
+            <a:schemeClr val="accent1"/>
+          </a:fillRef>
+          <a:effectRef idx="0">
+            <a:schemeClr val="accent1"/>
+          </a:effectRef>
+          <a:fontRef idx="minor">
+            <a:schemeClr val="lt1"/>
+          </a:fontRef>
+        </p:style>
+        <p:txBody>
+          <a:bodyPr rtlCol="0" anchor="ctr"/>
+          <a:lstStyle/>
+          <a:p>
+            <a:pPr algn="ctr"/>
+            <a:endParaRPr lang="ru-RU"/>
+          </a:p>
+        </p:txBody>
+      </p:sp>
+      <p:sp>
+        <p:nvSpPr>
+          <p:cNvPr id="2" name="TextBox 1"/>
+          <p:cNvSpPr txBox="1"/>
+          <p:nvPr/>
+        </p:nvSpPr>
+        <p:spPr>
+          <a:xfrm>
+            <a:off x="625540" y="208429"/>
+            <a:ext cx="8915012" cy="707886"/>
+          </a:xfrm>
+          <a:prstGeom prst="rect">
+            <a:avLst/>
+          </a:prstGeom>
+          <a:noFill/>
+        </p:spPr>
+        <p:txBody>
+          <a:bodyPr wrap="square" rtlCol="0">
+            <a:spAutoFit/>
+          </a:bodyPr>
+          <a:lstStyle/>
+          <a:p>
+            <a:r>
+              <a:rPr lang="en-US" sz="4000" b="1" dirty="0" smtClean="0">
+                <a:solidFill>
+                  <a:schemeClr val="bg1"/>
+                </a:solidFill>
+              </a:rPr>
+              <a:t>M</a:t>
+            </a:r>
+            <a:r>
+              <a:rPr lang="en-US" sz="4000" b="1" dirty="0" smtClean="0"/>
+              <a:t>ACHINE</a:t>
+            </a:r>
+            <a:r>
+              <a:rPr lang="en-US" sz="4000" b="1" dirty="0" smtClean="0">
+                <a:solidFill>
+                  <a:schemeClr val="bg1"/>
+                </a:solidFill>
+              </a:rPr>
+              <a:t> L</a:t>
+            </a:r>
+            <a:r>
+              <a:rPr lang="en-US" sz="4000" b="1" dirty="0" smtClean="0"/>
+              <a:t>EARNING</a:t>
+            </a:r>
+            <a:r>
+              <a:rPr lang="en-US" sz="4000" b="1" dirty="0" smtClean="0">
+                <a:solidFill>
+                  <a:schemeClr val="bg1"/>
+                </a:solidFill>
+              </a:rPr>
+              <a:t> </a:t>
+            </a:r>
+            <a:r>
+              <a:rPr lang="ru-RU" sz="4000" b="1" dirty="0" smtClean="0">
+                <a:solidFill>
+                  <a:schemeClr val="bg1"/>
+                </a:solidFill>
+              </a:rPr>
+              <a:t>МЕТОДЫ</a:t>
+            </a:r>
+            <a:endParaRPr lang="ru-RU" sz="4000" b="1" dirty="0">
+              <a:solidFill>
+                <a:schemeClr val="bg1"/>
+              </a:solidFill>
+            </a:endParaRPr>
+          </a:p>
+        </p:txBody>
+      </p:sp>
+      <p:sp>
+        <p:nvSpPr>
+          <p:cNvPr id="3" name="TextBox 2"/>
+          <p:cNvSpPr txBox="1"/>
+          <p:nvPr/>
+        </p:nvSpPr>
+        <p:spPr>
+          <a:xfrm>
+            <a:off x="625540" y="1124744"/>
+            <a:ext cx="4245586" cy="584775"/>
+          </a:xfrm>
+          <a:prstGeom prst="rect">
+            <a:avLst/>
+          </a:prstGeom>
+          <a:noFill/>
+        </p:spPr>
+        <p:txBody>
+          <a:bodyPr wrap="none" rtlCol="0">
+            <a:spAutoFit/>
+          </a:bodyPr>
+          <a:lstStyle/>
+          <a:p>
+            <a:r>
+              <a:rPr lang="en-US" sz="3200" b="1" dirty="0" smtClean="0">
+                <a:solidFill>
+                  <a:schemeClr val="bg1"/>
+                </a:solidFill>
+              </a:rPr>
+              <a:t>LOCAL OUTLIER FACTOR</a:t>
+            </a:r>
+            <a:endParaRPr lang="ru-RU" sz="3200" b="1" dirty="0">
+              <a:solidFill>
+                <a:schemeClr val="bg1"/>
+              </a:solidFill>
+            </a:endParaRPr>
+          </a:p>
+        </p:txBody>
+      </p:sp>
+      <p:pic>
+        <p:nvPicPr>
+          <p:cNvPr id="6" name="Рисунок 5"/>
+          <p:cNvPicPr>
+            <a:picLocks noChangeAspect="1"/>
+          </p:cNvPicPr>
+          <p:nvPr/>
+        </p:nvPicPr>
+        <p:blipFill>
+          <a:blip r:embed="rId4">
+            <a:extLst>
+              <a:ext uri="{28A0092B-C50C-407E-A947-70E740481C1C}">
+                <a14:useLocalDpi xmlns:a14="http://schemas.microsoft.com/office/drawing/2010/main" val="0"/>
+              </a:ext>
+            </a:extLst>
+          </a:blip>
+          <a:stretch>
+            <a:fillRect/>
+          </a:stretch>
+        </p:blipFill>
+        <p:spPr>
+          <a:xfrm>
+            <a:off x="755576" y="1916832"/>
+            <a:ext cx="5328592" cy="3996444"/>
+          </a:xfrm>
+          <a:prstGeom prst="rect">
+            <a:avLst/>
+          </a:prstGeom>
+        </p:spPr>
+      </p:pic>
+      <p:pic>
+        <p:nvPicPr>
+          <p:cNvPr id="8" name="Рисунок 7"/>
+          <p:cNvPicPr>
+            <a:picLocks noChangeAspect="1"/>
+          </p:cNvPicPr>
+          <p:nvPr/>
+        </p:nvPicPr>
+        <p:blipFill>
+          <a:blip r:embed="rId5">
+            <a:extLst>
+              <a:ext uri="{28A0092B-C50C-407E-A947-70E740481C1C}">
+                <a14:useLocalDpi xmlns:a14="http://schemas.microsoft.com/office/drawing/2010/main" val="0"/>
+              </a:ext>
+            </a:extLst>
+          </a:blip>
+          <a:stretch>
+            <a:fillRect/>
+          </a:stretch>
+        </p:blipFill>
+        <p:spPr>
+          <a:xfrm>
+            <a:off x="5292080" y="4437112"/>
+            <a:ext cx="3635734" cy="1953080"/>
+          </a:xfrm>
+          <a:prstGeom prst="rect">
+            <a:avLst/>
+          </a:prstGeom>
+          <a:ln w="38100" cap="sq">
+            <a:solidFill>
+              <a:srgbClr val="000000"/>
+            </a:solidFill>
+            <a:prstDash val="solid"/>
+            <a:miter lim="800000"/>
+          </a:ln>
+          <a:effectLst>
+            <a:outerShdw blurRad="50800" dist="38100" dir="2700000" algn="tl" rotWithShape="0">
+              <a:srgbClr val="000000">
+                <a:alpha val="43000"/>
+              </a:srgbClr>
+            </a:outerShdw>
+          </a:effectLst>
+        </p:spPr>
+      </p:pic>
+    </p:spTree>
+    <p:extLst>
+      <p:ext uri="{BB962C8B-B14F-4D97-AF65-F5344CB8AC3E}">
+        <p14:creationId xmlns:p14="http://schemas.microsoft.com/office/powerpoint/2010/main" val="3255815004"/>
       </p:ext>
     </p:extLst>
   </p:cSld>
